--- a/_PROMOCIJA/Predstavitev/Predstavitev.pptx
+++ b/_PROMOCIJA/Predstavitev/Predstavitev.pptx
@@ -5,8 +5,8 @@
     <p:sldMasterId id="2147483648" r:id="rId1"/>
   </p:sldMasterIdLst>
   <p:sldIdLst>
-    <p:sldId id="256" r:id="rId6"/>
-    <p:sldId id="257" r:id="rId7"/>
+    <p:sldId id="256" r:id="rId2"/>
+    <p:sldId id="257" r:id="rId3"/>
   </p:sldIdLst>
   <p:sldSz cx="20104100" cy="10052050"/>
   <p:notesSz cx="20104100" cy="10052050"/>
@@ -15,11 +15,27 @@
       <a:defRPr kern="0"/>
     </a:defPPr>
   </p:defaultTextStyle>
+  <p:extLst>
+    <p:ext uri="{EFAFB233-063F-42B5-8137-9DF3F51BA10A}">
+      <p15:sldGuideLst xmlns:p15="http://schemas.microsoft.com/office/powerpoint/2012/main">
+        <p15:guide id="1" orient="horz" pos="2880">
+          <p15:clr>
+            <a:srgbClr val="A4A3A4"/>
+          </p15:clr>
+        </p15:guide>
+        <p15:guide id="2" pos="2160">
+          <p15:clr>
+            <a:srgbClr val="A4A3A4"/>
+          </p15:clr>
+        </p15:guide>
+      </p15:sldGuideLst>
+    </p:ext>
+  </p:extLst>
 </p:presentation>
 </file>
 
 <file path=ppt/slideLayouts/slideLayout1.xml><?xml version="1.0" encoding="utf-8"?>
-<p:sldLayout xmlns:a="http://schemas.openxmlformats.org/drawingml/2006/main" xmlns:r="http://schemas.openxmlformats.org/officeDocument/2006/relationships" xmlns:p="http://schemas.openxmlformats.org/presentationml/2006/main" preserve="1" type="obj">
+<p:sldLayout xmlns:a="http://schemas.openxmlformats.org/drawingml/2006/main" xmlns:r="http://schemas.openxmlformats.org/officeDocument/2006/relationships" xmlns:p="http://schemas.openxmlformats.org/presentationml/2006/main" type="obj" preserve="1">
   <p:cSld name="Title Slide">
     <p:spTree>
       <p:nvGrpSpPr>
@@ -63,7 +79,9 @@
               <a:defRPr/>
             </a:lvl1pPr>
           </a:lstStyle>
-          <a:p/>
+          <a:p>
+            <a:endParaRPr/>
+          </a:p>
         </p:txBody>
       </p:sp>
       <p:sp>
@@ -94,7 +112,9 @@
               <a:defRPr/>
             </a:lvl1pPr>
           </a:lstStyle>
-          <a:p/>
+          <a:p>
+            <a:endParaRPr/>
+          </a:p>
         </p:txBody>
       </p:sp>
       <p:sp>
@@ -104,7 +124,7 @@
             <a:spLocks noGrp="1"/>
           </p:cNvSpPr>
           <p:nvPr>
-            <p:ph type="ftr" idx="5" sz="quarter"/>
+            <p:ph type="ftr" sz="quarter" idx="5"/>
           </p:nvPr>
         </p:nvSpPr>
         <p:spPr/>
@@ -121,7 +141,9 @@
               </a:defRPr>
             </a:lvl1pPr>
           </a:lstStyle>
-          <a:p/>
+          <a:p>
+            <a:endParaRPr/>
+          </a:p>
         </p:txBody>
       </p:sp>
       <p:sp>
@@ -131,7 +153,7 @@
             <a:spLocks noGrp="1"/>
           </p:cNvSpPr>
           <p:nvPr>
-            <p:ph type="dt" idx="6" sz="half"/>
+            <p:ph type="dt" sz="half" idx="6"/>
           </p:nvPr>
         </p:nvSpPr>
         <p:spPr/>
@@ -151,7 +173,9 @@
           <a:p>
             <a:fld id="{1D8BD707-D9CF-40AE-B4C6-C98DA3205C09}" type="datetimeFigureOut">
               <a:rPr lang="en-US"/>
+              <a:t>6/12/2025</a:t>
             </a:fld>
+            <a:endParaRPr lang="en-US"/>
           </a:p>
         </p:txBody>
       </p:sp>
@@ -162,7 +186,7 @@
             <a:spLocks noGrp="1"/>
           </p:cNvSpPr>
           <p:nvPr>
-            <p:ph type="sldNum" idx="7" sz="quarter"/>
+            <p:ph type="sldNum" sz="quarter" idx="7"/>
           </p:nvPr>
         </p:nvSpPr>
         <p:spPr/>
@@ -181,8 +205,9 @@
           </a:lstStyle>
           <a:p>
             <a:fld id="{B6F15528-21DE-4FAA-801E-634DDDAF4B2B}" type="slidenum">
-              <a:t>#</a:t>
+              <a:t>‹#›</a:t>
             </a:fld>
+            <a:endParaRPr/>
           </a:p>
         </p:txBody>
       </p:sp>
@@ -195,7 +220,7 @@
 </file>
 
 <file path=ppt/slideLayouts/slideLayout2.xml><?xml version="1.0" encoding="utf-8"?>
-<p:sldLayout xmlns:a="http://schemas.openxmlformats.org/drawingml/2006/main" xmlns:r="http://schemas.openxmlformats.org/officeDocument/2006/relationships" xmlns:p="http://schemas.openxmlformats.org/presentationml/2006/main" preserve="1" type="obj">
+<p:sldLayout xmlns:a="http://schemas.openxmlformats.org/drawingml/2006/main" xmlns:r="http://schemas.openxmlformats.org/officeDocument/2006/relationships" xmlns:p="http://schemas.openxmlformats.org/presentationml/2006/main" type="obj" preserve="1">
   <p:cSld name="Title and Content">
     <p:spTree>
       <p:nvGrpSpPr>
@@ -229,7 +254,9 @@
               <a:defRPr/>
             </a:lvl1pPr>
           </a:lstStyle>
-          <a:p/>
+          <a:p>
+            <a:endParaRPr/>
+          </a:p>
         </p:txBody>
       </p:sp>
       <p:sp>
@@ -250,7 +277,9 @@
               <a:defRPr/>
             </a:lvl1pPr>
           </a:lstStyle>
-          <a:p/>
+          <a:p>
+            <a:endParaRPr/>
+          </a:p>
         </p:txBody>
       </p:sp>
       <p:sp>
@@ -260,7 +289,7 @@
             <a:spLocks noGrp="1"/>
           </p:cNvSpPr>
           <p:nvPr>
-            <p:ph type="ftr" idx="5" sz="quarter"/>
+            <p:ph type="ftr" sz="quarter" idx="5"/>
           </p:nvPr>
         </p:nvSpPr>
         <p:spPr/>
@@ -277,7 +306,9 @@
               </a:defRPr>
             </a:lvl1pPr>
           </a:lstStyle>
-          <a:p/>
+          <a:p>
+            <a:endParaRPr/>
+          </a:p>
         </p:txBody>
       </p:sp>
       <p:sp>
@@ -287,7 +318,7 @@
             <a:spLocks noGrp="1"/>
           </p:cNvSpPr>
           <p:nvPr>
-            <p:ph type="dt" idx="6" sz="half"/>
+            <p:ph type="dt" sz="half" idx="6"/>
           </p:nvPr>
         </p:nvSpPr>
         <p:spPr/>
@@ -307,7 +338,9 @@
           <a:p>
             <a:fld id="{1D8BD707-D9CF-40AE-B4C6-C98DA3205C09}" type="datetimeFigureOut">
               <a:rPr lang="en-US"/>
+              <a:t>6/12/2025</a:t>
             </a:fld>
+            <a:endParaRPr lang="en-US"/>
           </a:p>
         </p:txBody>
       </p:sp>
@@ -318,7 +351,7 @@
             <a:spLocks noGrp="1"/>
           </p:cNvSpPr>
           <p:nvPr>
-            <p:ph type="sldNum" idx="7" sz="quarter"/>
+            <p:ph type="sldNum" sz="quarter" idx="7"/>
           </p:nvPr>
         </p:nvSpPr>
         <p:spPr/>
@@ -337,8 +370,9 @@
           </a:lstStyle>
           <a:p>
             <a:fld id="{B6F15528-21DE-4FAA-801E-634DDDAF4B2B}" type="slidenum">
-              <a:t>#</a:t>
+              <a:t>‹#›</a:t>
             </a:fld>
+            <a:endParaRPr/>
           </a:p>
         </p:txBody>
       </p:sp>
@@ -351,7 +385,7 @@
 </file>
 
 <file path=ppt/slideLayouts/slideLayout3.xml><?xml version="1.0" encoding="utf-8"?>
-<p:sldLayout xmlns:a="http://schemas.openxmlformats.org/drawingml/2006/main" xmlns:r="http://schemas.openxmlformats.org/officeDocument/2006/relationships" xmlns:p="http://schemas.openxmlformats.org/presentationml/2006/main" preserve="1" type="obj">
+<p:sldLayout xmlns:a="http://schemas.openxmlformats.org/drawingml/2006/main" xmlns:r="http://schemas.openxmlformats.org/officeDocument/2006/relationships" xmlns:p="http://schemas.openxmlformats.org/presentationml/2006/main" type="obj" preserve="1">
   <p:cSld name="Two Content">
     <p:spTree>
       <p:nvGrpSpPr>
@@ -385,7 +419,9 @@
               <a:defRPr/>
             </a:lvl1pPr>
           </a:lstStyle>
-          <a:p/>
+          <a:p>
+            <a:endParaRPr/>
+          </a:p>
         </p:txBody>
       </p:sp>
       <p:sp>
@@ -395,7 +431,7 @@
             <a:spLocks noGrp="1"/>
           </p:cNvSpPr>
           <p:nvPr>
-            <p:ph idx="2" sz="half"/>
+            <p:ph sz="half" idx="2"/>
           </p:nvPr>
         </p:nvSpPr>
         <p:spPr>
@@ -416,7 +452,9 @@
               <a:defRPr/>
             </a:lvl1pPr>
           </a:lstStyle>
-          <a:p/>
+          <a:p>
+            <a:endParaRPr/>
+          </a:p>
         </p:txBody>
       </p:sp>
       <p:sp>
@@ -426,7 +464,7 @@
             <a:spLocks noGrp="1"/>
           </p:cNvSpPr>
           <p:nvPr>
-            <p:ph idx="3" sz="half"/>
+            <p:ph sz="half" idx="3"/>
           </p:nvPr>
         </p:nvSpPr>
         <p:spPr>
@@ -447,7 +485,9 @@
               <a:defRPr/>
             </a:lvl1pPr>
           </a:lstStyle>
-          <a:p/>
+          <a:p>
+            <a:endParaRPr/>
+          </a:p>
         </p:txBody>
       </p:sp>
       <p:sp>
@@ -457,7 +497,7 @@
             <a:spLocks noGrp="1"/>
           </p:cNvSpPr>
           <p:nvPr>
-            <p:ph type="ftr" idx="5" sz="quarter"/>
+            <p:ph type="ftr" sz="quarter" idx="5"/>
           </p:nvPr>
         </p:nvSpPr>
         <p:spPr/>
@@ -474,7 +514,9 @@
               </a:defRPr>
             </a:lvl1pPr>
           </a:lstStyle>
-          <a:p/>
+          <a:p>
+            <a:endParaRPr/>
+          </a:p>
         </p:txBody>
       </p:sp>
       <p:sp>
@@ -484,7 +526,7 @@
             <a:spLocks noGrp="1"/>
           </p:cNvSpPr>
           <p:nvPr>
-            <p:ph type="dt" idx="6" sz="half"/>
+            <p:ph type="dt" sz="half" idx="6"/>
           </p:nvPr>
         </p:nvSpPr>
         <p:spPr/>
@@ -504,7 +546,9 @@
           <a:p>
             <a:fld id="{1D8BD707-D9CF-40AE-B4C6-C98DA3205C09}" type="datetimeFigureOut">
               <a:rPr lang="en-US"/>
+              <a:t>6/12/2025</a:t>
             </a:fld>
+            <a:endParaRPr lang="en-US"/>
           </a:p>
         </p:txBody>
       </p:sp>
@@ -515,7 +559,7 @@
             <a:spLocks noGrp="1"/>
           </p:cNvSpPr>
           <p:nvPr>
-            <p:ph type="sldNum" idx="7" sz="quarter"/>
+            <p:ph type="sldNum" sz="quarter" idx="7"/>
           </p:nvPr>
         </p:nvSpPr>
         <p:spPr/>
@@ -534,8 +578,9 @@
           </a:lstStyle>
           <a:p>
             <a:fld id="{B6F15528-21DE-4FAA-801E-634DDDAF4B2B}" type="slidenum">
-              <a:t>#</a:t>
+              <a:t>‹#›</a:t>
             </a:fld>
+            <a:endParaRPr/>
           </a:p>
         </p:txBody>
       </p:sp>
@@ -548,7 +593,7 @@
 </file>
 
 <file path=ppt/slideLayouts/slideLayout4.xml><?xml version="1.0" encoding="utf-8"?>
-<p:sldLayout xmlns:a="http://schemas.openxmlformats.org/drawingml/2006/main" xmlns:r="http://schemas.openxmlformats.org/officeDocument/2006/relationships" xmlns:p="http://schemas.openxmlformats.org/presentationml/2006/main" preserve="1" type="obj">
+<p:sldLayout xmlns:a="http://schemas.openxmlformats.org/drawingml/2006/main" xmlns:r="http://schemas.openxmlformats.org/officeDocument/2006/relationships" xmlns:p="http://schemas.openxmlformats.org/presentationml/2006/main" type="obj" preserve="1">
   <p:cSld name="Title Only">
     <p:spTree>
       <p:nvGrpSpPr>
@@ -582,7 +627,9 @@
               <a:defRPr/>
             </a:lvl1pPr>
           </a:lstStyle>
-          <a:p/>
+          <a:p>
+            <a:endParaRPr/>
+          </a:p>
         </p:txBody>
       </p:sp>
       <p:sp>
@@ -592,7 +639,7 @@
             <a:spLocks noGrp="1"/>
           </p:cNvSpPr>
           <p:nvPr>
-            <p:ph type="ftr" idx="5" sz="quarter"/>
+            <p:ph type="ftr" sz="quarter" idx="5"/>
           </p:nvPr>
         </p:nvSpPr>
         <p:spPr/>
@@ -609,7 +656,9 @@
               </a:defRPr>
             </a:lvl1pPr>
           </a:lstStyle>
-          <a:p/>
+          <a:p>
+            <a:endParaRPr/>
+          </a:p>
         </p:txBody>
       </p:sp>
       <p:sp>
@@ -619,7 +668,7 @@
             <a:spLocks noGrp="1"/>
           </p:cNvSpPr>
           <p:nvPr>
-            <p:ph type="dt" idx="6" sz="half"/>
+            <p:ph type="dt" sz="half" idx="6"/>
           </p:nvPr>
         </p:nvSpPr>
         <p:spPr/>
@@ -639,7 +688,9 @@
           <a:p>
             <a:fld id="{1D8BD707-D9CF-40AE-B4C6-C98DA3205C09}" type="datetimeFigureOut">
               <a:rPr lang="en-US"/>
+              <a:t>6/12/2025</a:t>
             </a:fld>
+            <a:endParaRPr lang="en-US"/>
           </a:p>
         </p:txBody>
       </p:sp>
@@ -650,7 +701,7 @@
             <a:spLocks noGrp="1"/>
           </p:cNvSpPr>
           <p:nvPr>
-            <p:ph type="sldNum" idx="7" sz="quarter"/>
+            <p:ph type="sldNum" sz="quarter" idx="7"/>
           </p:nvPr>
         </p:nvSpPr>
         <p:spPr/>
@@ -669,8 +720,9 @@
           </a:lstStyle>
           <a:p>
             <a:fld id="{B6F15528-21DE-4FAA-801E-634DDDAF4B2B}" type="slidenum">
-              <a:t>#</a:t>
+              <a:t>‹#›</a:t>
             </a:fld>
+            <a:endParaRPr/>
           </a:p>
         </p:txBody>
       </p:sp>
@@ -683,7 +735,7 @@
 </file>
 
 <file path=ppt/slideLayouts/slideLayout5.xml><?xml version="1.0" encoding="utf-8"?>
-<p:sldLayout xmlns:a="http://schemas.openxmlformats.org/drawingml/2006/main" xmlns:r="http://schemas.openxmlformats.org/officeDocument/2006/relationships" xmlns:p="http://schemas.openxmlformats.org/presentationml/2006/main" preserve="1" type="obj">
+<p:sldLayout xmlns:a="http://schemas.openxmlformats.org/drawingml/2006/main" xmlns:r="http://schemas.openxmlformats.org/officeDocument/2006/relationships" xmlns:p="http://schemas.openxmlformats.org/presentationml/2006/main" type="obj" preserve="1">
   <p:cSld name="Blank">
     <p:spTree>
       <p:nvGrpSpPr>
@@ -706,7 +758,7 @@
             <a:spLocks noGrp="1"/>
           </p:cNvSpPr>
           <p:nvPr>
-            <p:ph type="ftr" idx="5" sz="quarter"/>
+            <p:ph type="ftr" sz="quarter" idx="5"/>
           </p:nvPr>
         </p:nvSpPr>
         <p:spPr/>
@@ -723,7 +775,9 @@
               </a:defRPr>
             </a:lvl1pPr>
           </a:lstStyle>
-          <a:p/>
+          <a:p>
+            <a:endParaRPr/>
+          </a:p>
         </p:txBody>
       </p:sp>
       <p:sp>
@@ -733,7 +787,7 @@
             <a:spLocks noGrp="1"/>
           </p:cNvSpPr>
           <p:nvPr>
-            <p:ph type="dt" idx="6" sz="half"/>
+            <p:ph type="dt" sz="half" idx="6"/>
           </p:nvPr>
         </p:nvSpPr>
         <p:spPr/>
@@ -753,7 +807,9 @@
           <a:p>
             <a:fld id="{1D8BD707-D9CF-40AE-B4C6-C98DA3205C09}" type="datetimeFigureOut">
               <a:rPr lang="en-US"/>
+              <a:t>6/12/2025</a:t>
             </a:fld>
+            <a:endParaRPr lang="en-US"/>
           </a:p>
         </p:txBody>
       </p:sp>
@@ -764,7 +820,7 @@
             <a:spLocks noGrp="1"/>
           </p:cNvSpPr>
           <p:nvPr>
-            <p:ph type="sldNum" idx="7" sz="quarter"/>
+            <p:ph type="sldNum" sz="quarter" idx="7"/>
           </p:nvPr>
         </p:nvSpPr>
         <p:spPr/>
@@ -783,8 +839,9 @@
           </a:lstStyle>
           <a:p>
             <a:fld id="{B6F15528-21DE-4FAA-801E-634DDDAF4B2B}" type="slidenum">
-              <a:t>#</a:t>
+              <a:t>‹#›</a:t>
             </a:fld>
+            <a:endParaRPr/>
           </a:p>
         </p:txBody>
       </p:sp>
@@ -866,7 +923,9 @@
         <p:txBody>
           <a:bodyPr wrap="square" lIns="0" tIns="0" rIns="0" bIns="0" rtlCol="0"/>
           <a:lstStyle/>
-          <a:p/>
+          <a:p>
+            <a:endParaRPr/>
+          </a:p>
         </p:txBody>
       </p:sp>
       <p:pic>
@@ -919,7 +978,9 @@
               <a:defRPr/>
             </a:lvl1pPr>
           </a:lstStyle>
-          <a:p/>
+          <a:p>
+            <a:endParaRPr/>
+          </a:p>
         </p:txBody>
       </p:sp>
       <p:sp>
@@ -950,7 +1011,9 @@
               <a:defRPr/>
             </a:lvl1pPr>
           </a:lstStyle>
-          <a:p/>
+          <a:p>
+            <a:endParaRPr/>
+          </a:p>
         </p:txBody>
       </p:sp>
       <p:sp>
@@ -960,7 +1023,7 @@
             <a:spLocks noGrp="1"/>
           </p:cNvSpPr>
           <p:nvPr>
-            <p:ph type="ftr" idx="5" sz="quarter"/>
+            <p:ph type="ftr" sz="quarter" idx="5"/>
           </p:nvPr>
         </p:nvSpPr>
         <p:spPr>
@@ -987,7 +1050,9 @@
               </a:defRPr>
             </a:lvl1pPr>
           </a:lstStyle>
-          <a:p/>
+          <a:p>
+            <a:endParaRPr/>
+          </a:p>
         </p:txBody>
       </p:sp>
       <p:sp>
@@ -997,7 +1062,7 @@
             <a:spLocks noGrp="1"/>
           </p:cNvSpPr>
           <p:nvPr>
-            <p:ph type="dt" idx="6" sz="half"/>
+            <p:ph type="dt" sz="half" idx="6"/>
           </p:nvPr>
         </p:nvSpPr>
         <p:spPr>
@@ -1027,7 +1092,9 @@
           <a:p>
             <a:fld id="{1D8BD707-D9CF-40AE-B4C6-C98DA3205C09}" type="datetimeFigureOut">
               <a:rPr lang="en-US"/>
+              <a:t>6/12/2025</a:t>
             </a:fld>
+            <a:endParaRPr lang="en-US"/>
           </a:p>
         </p:txBody>
       </p:sp>
@@ -1038,7 +1105,7 @@
             <a:spLocks noGrp="1"/>
           </p:cNvSpPr>
           <p:nvPr>
-            <p:ph type="sldNum" idx="7" sz="quarter"/>
+            <p:ph type="sldNum" sz="quarter" idx="7"/>
           </p:nvPr>
         </p:nvSpPr>
         <p:spPr>
@@ -1067,14 +1134,15 @@
           </a:lstStyle>
           <a:p>
             <a:fld id="{B6F15528-21DE-4FAA-801E-634DDDAF4B2B}" type="slidenum">
-              <a:t>#</a:t>
+              <a:t>‹#›</a:t>
             </a:fld>
+            <a:endParaRPr/>
           </a:p>
         </p:txBody>
       </p:sp>
     </p:spTree>
   </p:cSld>
-  <p:clrMap folHlink="folHlink" hlink="hlink" accent1="accent1" accent2="accent2" accent3="accent3" accent4="accent4" accent5="accent5" accent6="accent6" tx2="dk2" bg2="lt2" tx1="dk1" bg1="lt1"/>
+  <p:clrMap bg1="lt1" tx1="dk1" bg2="lt2" tx2="dk2" accent1="accent1" accent2="accent2" accent3="accent3" accent4="accent4" accent5="accent5" accent6="accent6" hlink="hlink" folHlink="folHlink"/>
   <p:sldLayoutIdLst>
     <p:sldLayoutId id="2147483661" r:id="rId1"/>
     <p:sldLayoutId id="2147483662" r:id="rId2"/>
@@ -1243,31 +1311,9 @@
           <a:chExt cx="0" cy="0"/>
         </a:xfrm>
       </p:grpSpPr>
-      <p:pic>
-        <p:nvPicPr>
-          <p:cNvPr id="2" name="object 2" descr=""/>
-          <p:cNvPicPr/>
-          <p:nvPr/>
-        </p:nvPicPr>
-        <p:blipFill>
-          <a:blip r:embed="rId2" cstate="print"/>
-          <a:stretch>
-            <a:fillRect/>
-          </a:stretch>
-        </p:blipFill>
-        <p:spPr>
-          <a:xfrm>
-            <a:off x="874616" y="759258"/>
-            <a:ext cx="3562592" cy="313085"/>
-          </a:xfrm>
-          <a:prstGeom prst="rect">
-            <a:avLst/>
-          </a:prstGeom>
-        </p:spPr>
-      </p:pic>
       <p:sp>
         <p:nvSpPr>
-          <p:cNvPr id="3" name="object 3" descr=""/>
+          <p:cNvPr id="3" name="object 3"/>
           <p:cNvSpPr/>
           <p:nvPr/>
         </p:nvSpPr>
@@ -2537,12 +2583,14 @@
         <p:txBody>
           <a:bodyPr wrap="square" lIns="0" tIns="0" rIns="0" bIns="0" rtlCol="0"/>
           <a:lstStyle/>
-          <a:p/>
+          <a:p>
+            <a:endParaRPr dirty="0"/>
+          </a:p>
         </p:txBody>
       </p:sp>
       <p:sp>
         <p:nvSpPr>
-          <p:cNvPr id="4" name="object 4" descr=""/>
+          <p:cNvPr id="4" name="object 4"/>
           <p:cNvSpPr/>
           <p:nvPr/>
         </p:nvSpPr>
@@ -3548,12 +3596,14 @@
         <p:txBody>
           <a:bodyPr wrap="square" lIns="0" tIns="0" rIns="0" bIns="0" rtlCol="0"/>
           <a:lstStyle/>
-          <a:p/>
+          <a:p>
+            <a:endParaRPr/>
+          </a:p>
         </p:txBody>
       </p:sp>
       <p:grpSp>
         <p:nvGrpSpPr>
-          <p:cNvPr id="5" name="object 5" descr=""/>
+          <p:cNvPr id="5" name="object 5"/>
           <p:cNvGrpSpPr/>
           <p:nvPr/>
         </p:nvGrpSpPr>
@@ -3567,7 +3617,7 @@
         </p:grpSpPr>
         <p:sp>
           <p:nvSpPr>
-            <p:cNvPr id="6" name="object 6" descr=""/>
+            <p:cNvPr id="6" name="object 6"/>
             <p:cNvSpPr/>
             <p:nvPr/>
           </p:nvSpPr>
@@ -3673,12 +3723,14 @@
           <p:txBody>
             <a:bodyPr wrap="square" lIns="0" tIns="0" rIns="0" bIns="0" rtlCol="0"/>
             <a:lstStyle/>
-            <a:p/>
+            <a:p>
+              <a:endParaRPr/>
+            </a:p>
           </p:txBody>
         </p:sp>
         <p:sp>
           <p:nvSpPr>
-            <p:cNvPr id="7" name="object 7" descr=""/>
+            <p:cNvPr id="7" name="object 7"/>
             <p:cNvSpPr/>
             <p:nvPr/>
           </p:nvSpPr>
@@ -4294,17 +4346,19 @@
           <p:txBody>
             <a:bodyPr wrap="square" lIns="0" tIns="0" rIns="0" bIns="0" rtlCol="0"/>
             <a:lstStyle/>
-            <a:p/>
+            <a:p>
+              <a:endParaRPr/>
+            </a:p>
           </p:txBody>
         </p:sp>
         <p:pic>
           <p:nvPicPr>
-            <p:cNvPr id="8" name="object 8" descr=""/>
+            <p:cNvPr id="8" name="object 8"/>
             <p:cNvPicPr/>
             <p:nvPr/>
           </p:nvPicPr>
           <p:blipFill>
-            <a:blip r:embed="rId3" cstate="print"/>
+            <a:blip r:embed="rId2" cstate="print"/>
             <a:stretch>
               <a:fillRect/>
             </a:stretch>
@@ -4321,7 +4375,7 @@
         </p:pic>
         <p:sp>
           <p:nvSpPr>
-            <p:cNvPr id="9" name="object 9" descr=""/>
+            <p:cNvPr id="9" name="object 9"/>
             <p:cNvSpPr/>
             <p:nvPr/>
           </p:nvSpPr>
@@ -4516,12 +4570,14 @@
           <p:txBody>
             <a:bodyPr wrap="square" lIns="0" tIns="0" rIns="0" bIns="0" rtlCol="0"/>
             <a:lstStyle/>
-            <a:p/>
+            <a:p>
+              <a:endParaRPr/>
+            </a:p>
           </p:txBody>
         </p:sp>
         <p:sp>
           <p:nvSpPr>
-            <p:cNvPr id="10" name="object 10" descr=""/>
+            <p:cNvPr id="10" name="object 10"/>
             <p:cNvSpPr/>
             <p:nvPr/>
           </p:nvSpPr>
@@ -4581,17 +4637,19 @@
           <p:txBody>
             <a:bodyPr wrap="square" lIns="0" tIns="0" rIns="0" bIns="0" rtlCol="0"/>
             <a:lstStyle/>
-            <a:p/>
+            <a:p>
+              <a:endParaRPr/>
+            </a:p>
           </p:txBody>
         </p:sp>
         <p:pic>
           <p:nvPicPr>
-            <p:cNvPr id="11" name="object 11" descr=""/>
+            <p:cNvPr id="11" name="object 11"/>
             <p:cNvPicPr/>
             <p:nvPr/>
           </p:nvPicPr>
           <p:blipFill>
-            <a:blip r:embed="rId4" cstate="print"/>
+            <a:blip r:embed="rId3" cstate="print"/>
             <a:stretch>
               <a:fillRect/>
             </a:stretch>
@@ -4608,7 +4666,7 @@
         </p:pic>
         <p:sp>
           <p:nvSpPr>
-            <p:cNvPr id="12" name="object 12" descr=""/>
+            <p:cNvPr id="12" name="object 12"/>
             <p:cNvSpPr/>
             <p:nvPr/>
           </p:nvSpPr>
@@ -4693,17 +4751,19 @@
           <p:txBody>
             <a:bodyPr wrap="square" lIns="0" tIns="0" rIns="0" bIns="0" rtlCol="0"/>
             <a:lstStyle/>
-            <a:p/>
+            <a:p>
+              <a:endParaRPr/>
+            </a:p>
           </p:txBody>
         </p:sp>
         <p:pic>
           <p:nvPicPr>
-            <p:cNvPr id="13" name="object 13" descr=""/>
+            <p:cNvPr id="13" name="object 13"/>
             <p:cNvPicPr/>
             <p:nvPr/>
           </p:nvPicPr>
           <p:blipFill>
-            <a:blip r:embed="rId5" cstate="print"/>
+            <a:blip r:embed="rId4" cstate="print"/>
             <a:stretch>
               <a:fillRect/>
             </a:stretch>
@@ -4720,7 +4780,7 @@
         </p:pic>
         <p:sp>
           <p:nvSpPr>
-            <p:cNvPr id="14" name="object 14" descr=""/>
+            <p:cNvPr id="14" name="object 14"/>
             <p:cNvSpPr/>
             <p:nvPr/>
           </p:nvSpPr>
@@ -5456,17 +5516,19 @@
           <p:txBody>
             <a:bodyPr wrap="square" lIns="0" tIns="0" rIns="0" bIns="0" rtlCol="0"/>
             <a:lstStyle/>
-            <a:p/>
+            <a:p>
+              <a:endParaRPr/>
+            </a:p>
           </p:txBody>
         </p:sp>
         <p:pic>
           <p:nvPicPr>
-            <p:cNvPr id="15" name="object 15" descr=""/>
+            <p:cNvPr id="15" name="object 15"/>
             <p:cNvPicPr/>
             <p:nvPr/>
           </p:nvPicPr>
           <p:blipFill>
-            <a:blip r:embed="rId6" cstate="print"/>
+            <a:blip r:embed="rId5" cstate="print"/>
             <a:stretch>
               <a:fillRect/>
             </a:stretch>
@@ -5483,12 +5545,12 @@
         </p:pic>
         <p:pic>
           <p:nvPicPr>
-            <p:cNvPr id="16" name="object 16" descr=""/>
+            <p:cNvPr id="16" name="object 16"/>
             <p:cNvPicPr/>
             <p:nvPr/>
           </p:nvPicPr>
           <p:blipFill>
-            <a:blip r:embed="rId7" cstate="print"/>
+            <a:blip r:embed="rId6" cstate="print"/>
             <a:stretch>
               <a:fillRect/>
             </a:stretch>
@@ -5505,7 +5567,7 @@
         </p:pic>
         <p:sp>
           <p:nvSpPr>
-            <p:cNvPr id="17" name="object 17" descr=""/>
+            <p:cNvPr id="17" name="object 17"/>
             <p:cNvSpPr/>
             <p:nvPr/>
           </p:nvSpPr>
@@ -5598,12 +5660,14 @@
           <p:txBody>
             <a:bodyPr wrap="square" lIns="0" tIns="0" rIns="0" bIns="0" rtlCol="0"/>
             <a:lstStyle/>
-            <a:p/>
+            <a:p>
+              <a:endParaRPr/>
+            </a:p>
           </p:txBody>
         </p:sp>
         <p:sp>
           <p:nvSpPr>
-            <p:cNvPr id="18" name="object 18" descr=""/>
+            <p:cNvPr id="18" name="object 18"/>
             <p:cNvSpPr/>
             <p:nvPr/>
           </p:nvSpPr>
@@ -5678,17 +5742,19 @@
           <p:txBody>
             <a:bodyPr wrap="square" lIns="0" tIns="0" rIns="0" bIns="0" rtlCol="0"/>
             <a:lstStyle/>
-            <a:p/>
+            <a:p>
+              <a:endParaRPr/>
+            </a:p>
           </p:txBody>
         </p:sp>
         <p:pic>
           <p:nvPicPr>
-            <p:cNvPr id="19" name="object 19" descr=""/>
+            <p:cNvPr id="19" name="object 19"/>
             <p:cNvPicPr/>
             <p:nvPr/>
           </p:nvPicPr>
           <p:blipFill>
-            <a:blip r:embed="rId8" cstate="print"/>
+            <a:blip r:embed="rId7" cstate="print"/>
             <a:stretch>
               <a:fillRect/>
             </a:stretch>
@@ -5705,7 +5771,7 @@
         </p:pic>
         <p:sp>
           <p:nvSpPr>
-            <p:cNvPr id="20" name="object 20" descr=""/>
+            <p:cNvPr id="20" name="object 20"/>
             <p:cNvSpPr/>
             <p:nvPr/>
           </p:nvSpPr>
@@ -5780,17 +5846,19 @@
           <p:txBody>
             <a:bodyPr wrap="square" lIns="0" tIns="0" rIns="0" bIns="0" rtlCol="0"/>
             <a:lstStyle/>
-            <a:p/>
+            <a:p>
+              <a:endParaRPr/>
+            </a:p>
           </p:txBody>
         </p:sp>
         <p:pic>
           <p:nvPicPr>
-            <p:cNvPr id="21" name="object 21" descr=""/>
+            <p:cNvPr id="21" name="object 21"/>
             <p:cNvPicPr/>
             <p:nvPr/>
           </p:nvPicPr>
           <p:blipFill>
-            <a:blip r:embed="rId9" cstate="print"/>
+            <a:blip r:embed="rId8" cstate="print"/>
             <a:stretch>
               <a:fillRect/>
             </a:stretch>
@@ -5807,12 +5875,12 @@
         </p:pic>
         <p:pic>
           <p:nvPicPr>
-            <p:cNvPr id="22" name="object 22" descr=""/>
+            <p:cNvPr id="22" name="object 22"/>
             <p:cNvPicPr/>
             <p:nvPr/>
           </p:nvPicPr>
           <p:blipFill>
-            <a:blip r:embed="rId10" cstate="print"/>
+            <a:blip r:embed="rId9" cstate="print"/>
             <a:stretch>
               <a:fillRect/>
             </a:stretch>
@@ -5829,12 +5897,12 @@
         </p:pic>
         <p:pic>
           <p:nvPicPr>
-            <p:cNvPr id="23" name="object 23" descr=""/>
+            <p:cNvPr id="23" name="object 23"/>
             <p:cNvPicPr/>
             <p:nvPr/>
           </p:nvPicPr>
           <p:blipFill>
-            <a:blip r:embed="rId11" cstate="print"/>
+            <a:blip r:embed="rId10" cstate="print"/>
             <a:stretch>
               <a:fillRect/>
             </a:stretch>
@@ -5851,12 +5919,12 @@
         </p:pic>
         <p:pic>
           <p:nvPicPr>
-            <p:cNvPr id="24" name="object 24" descr=""/>
+            <p:cNvPr id="24" name="object 24"/>
             <p:cNvPicPr/>
             <p:nvPr/>
           </p:nvPicPr>
           <p:blipFill>
-            <a:blip r:embed="rId12" cstate="print"/>
+            <a:blip r:embed="rId11" cstate="print"/>
             <a:stretch>
               <a:fillRect/>
             </a:stretch>
@@ -5873,7 +5941,7 @@
         </p:pic>
         <p:sp>
           <p:nvSpPr>
-            <p:cNvPr id="25" name="object 25" descr=""/>
+            <p:cNvPr id="25" name="object 25"/>
             <p:cNvSpPr/>
             <p:nvPr/>
           </p:nvSpPr>
@@ -5964,12 +6032,14 @@
           <p:txBody>
             <a:bodyPr wrap="square" lIns="0" tIns="0" rIns="0" bIns="0" rtlCol="0"/>
             <a:lstStyle/>
-            <a:p/>
+            <a:p>
+              <a:endParaRPr/>
+            </a:p>
           </p:txBody>
         </p:sp>
         <p:sp>
           <p:nvSpPr>
-            <p:cNvPr id="26" name="object 26" descr=""/>
+            <p:cNvPr id="26" name="object 26"/>
             <p:cNvSpPr/>
             <p:nvPr/>
           </p:nvSpPr>
@@ -6164,12 +6234,14 @@
           <p:txBody>
             <a:bodyPr wrap="square" lIns="0" tIns="0" rIns="0" bIns="0" rtlCol="0"/>
             <a:lstStyle/>
-            <a:p/>
+            <a:p>
+              <a:endParaRPr/>
+            </a:p>
           </p:txBody>
         </p:sp>
         <p:sp>
           <p:nvSpPr>
-            <p:cNvPr id="27" name="object 27" descr=""/>
+            <p:cNvPr id="27" name="object 27"/>
             <p:cNvSpPr/>
             <p:nvPr/>
           </p:nvSpPr>
@@ -6620,12 +6692,14 @@
           <p:txBody>
             <a:bodyPr wrap="square" lIns="0" tIns="0" rIns="0" bIns="0" rtlCol="0"/>
             <a:lstStyle/>
-            <a:p/>
+            <a:p>
+              <a:endParaRPr/>
+            </a:p>
           </p:txBody>
         </p:sp>
         <p:sp>
           <p:nvSpPr>
-            <p:cNvPr id="28" name="object 28" descr=""/>
+            <p:cNvPr id="28" name="object 28"/>
             <p:cNvSpPr/>
             <p:nvPr/>
           </p:nvSpPr>
@@ -6718,12 +6792,14 @@
           <p:txBody>
             <a:bodyPr wrap="square" lIns="0" tIns="0" rIns="0" bIns="0" rtlCol="0"/>
             <a:lstStyle/>
-            <a:p/>
+            <a:p>
+              <a:endParaRPr/>
+            </a:p>
           </p:txBody>
         </p:sp>
         <p:sp>
           <p:nvSpPr>
-            <p:cNvPr id="29" name="object 29" descr=""/>
+            <p:cNvPr id="29" name="object 29"/>
             <p:cNvSpPr/>
             <p:nvPr/>
           </p:nvSpPr>
@@ -6783,12 +6859,14 @@
           <p:txBody>
             <a:bodyPr wrap="square" lIns="0" tIns="0" rIns="0" bIns="0" rtlCol="0"/>
             <a:lstStyle/>
-            <a:p/>
+            <a:p>
+              <a:endParaRPr/>
+            </a:p>
           </p:txBody>
         </p:sp>
         <p:sp>
           <p:nvSpPr>
-            <p:cNvPr id="30" name="object 30" descr=""/>
+            <p:cNvPr id="30" name="object 30"/>
             <p:cNvSpPr/>
             <p:nvPr/>
           </p:nvSpPr>
@@ -7095,12 +7173,14 @@
           <p:txBody>
             <a:bodyPr wrap="square" lIns="0" tIns="0" rIns="0" bIns="0" rtlCol="0"/>
             <a:lstStyle/>
-            <a:p/>
+            <a:p>
+              <a:endParaRPr/>
+            </a:p>
           </p:txBody>
         </p:sp>
         <p:sp>
           <p:nvSpPr>
-            <p:cNvPr id="31" name="object 31" descr=""/>
+            <p:cNvPr id="31" name="object 31"/>
             <p:cNvSpPr/>
             <p:nvPr/>
           </p:nvSpPr>
@@ -7160,17 +7240,19 @@
           <p:txBody>
             <a:bodyPr wrap="square" lIns="0" tIns="0" rIns="0" bIns="0" rtlCol="0"/>
             <a:lstStyle/>
-            <a:p/>
+            <a:p>
+              <a:endParaRPr/>
+            </a:p>
           </p:txBody>
         </p:sp>
         <p:pic>
           <p:nvPicPr>
-            <p:cNvPr id="32" name="object 32" descr=""/>
+            <p:cNvPr id="32" name="object 32"/>
             <p:cNvPicPr/>
             <p:nvPr/>
           </p:nvPicPr>
           <p:blipFill>
-            <a:blip r:embed="rId13" cstate="print"/>
+            <a:blip r:embed="rId12" cstate="print"/>
             <a:stretch>
               <a:fillRect/>
             </a:stretch>
@@ -7187,12 +7269,12 @@
         </p:pic>
         <p:pic>
           <p:nvPicPr>
-            <p:cNvPr id="33" name="object 33" descr=""/>
+            <p:cNvPr id="33" name="object 33"/>
             <p:cNvPicPr/>
             <p:nvPr/>
           </p:nvPicPr>
           <p:blipFill>
-            <a:blip r:embed="rId14" cstate="print"/>
+            <a:blip r:embed="rId13" cstate="print"/>
             <a:stretch>
               <a:fillRect/>
             </a:stretch>
@@ -7209,12 +7291,12 @@
         </p:pic>
         <p:pic>
           <p:nvPicPr>
-            <p:cNvPr id="34" name="object 34" descr=""/>
+            <p:cNvPr id="34" name="object 34"/>
             <p:cNvPicPr/>
             <p:nvPr/>
           </p:nvPicPr>
           <p:blipFill>
-            <a:blip r:embed="rId15" cstate="print"/>
+            <a:blip r:embed="rId14" cstate="print"/>
             <a:stretch>
               <a:fillRect/>
             </a:stretch>
@@ -7231,7 +7313,7 @@
         </p:pic>
         <p:sp>
           <p:nvSpPr>
-            <p:cNvPr id="35" name="object 35" descr=""/>
+            <p:cNvPr id="35" name="object 35"/>
             <p:cNvSpPr/>
             <p:nvPr/>
           </p:nvSpPr>
@@ -7361,12 +7443,14 @@
           <p:txBody>
             <a:bodyPr wrap="square" lIns="0" tIns="0" rIns="0" bIns="0" rtlCol="0"/>
             <a:lstStyle/>
-            <a:p/>
+            <a:p>
+              <a:endParaRPr/>
+            </a:p>
           </p:txBody>
         </p:sp>
         <p:sp>
           <p:nvSpPr>
-            <p:cNvPr id="36" name="object 36" descr=""/>
+            <p:cNvPr id="36" name="object 36"/>
             <p:cNvSpPr/>
             <p:nvPr/>
           </p:nvSpPr>
@@ -7676,12 +7760,14 @@
           <p:txBody>
             <a:bodyPr wrap="square" lIns="0" tIns="0" rIns="0" bIns="0" rtlCol="0"/>
             <a:lstStyle/>
-            <a:p/>
+            <a:p>
+              <a:endParaRPr/>
+            </a:p>
           </p:txBody>
         </p:sp>
         <p:sp>
           <p:nvSpPr>
-            <p:cNvPr id="37" name="object 37" descr=""/>
+            <p:cNvPr id="37" name="object 37"/>
             <p:cNvSpPr/>
             <p:nvPr/>
           </p:nvSpPr>
@@ -7784,17 +7870,19 @@
           <p:txBody>
             <a:bodyPr wrap="square" lIns="0" tIns="0" rIns="0" bIns="0" rtlCol="0"/>
             <a:lstStyle/>
-            <a:p/>
+            <a:p>
+              <a:endParaRPr/>
+            </a:p>
           </p:txBody>
         </p:sp>
         <p:pic>
           <p:nvPicPr>
-            <p:cNvPr id="38" name="object 38" descr=""/>
+            <p:cNvPr id="38" name="object 38"/>
             <p:cNvPicPr/>
             <p:nvPr/>
           </p:nvPicPr>
           <p:blipFill>
-            <a:blip r:embed="rId16" cstate="print"/>
+            <a:blip r:embed="rId15" cstate="print"/>
             <a:stretch>
               <a:fillRect/>
             </a:stretch>
@@ -7811,7 +7899,7 @@
         </p:pic>
         <p:sp>
           <p:nvSpPr>
-            <p:cNvPr id="39" name="object 39" descr=""/>
+            <p:cNvPr id="39" name="object 39"/>
             <p:cNvSpPr/>
             <p:nvPr/>
           </p:nvSpPr>
@@ -7926,17 +8014,19 @@
           <p:txBody>
             <a:bodyPr wrap="square" lIns="0" tIns="0" rIns="0" bIns="0" rtlCol="0"/>
             <a:lstStyle/>
-            <a:p/>
+            <a:p>
+              <a:endParaRPr/>
+            </a:p>
           </p:txBody>
         </p:sp>
         <p:pic>
           <p:nvPicPr>
-            <p:cNvPr id="40" name="object 40" descr=""/>
+            <p:cNvPr id="40" name="object 40"/>
             <p:cNvPicPr/>
             <p:nvPr/>
           </p:nvPicPr>
           <p:blipFill>
-            <a:blip r:embed="rId17" cstate="print"/>
+            <a:blip r:embed="rId16" cstate="print"/>
             <a:stretch>
               <a:fillRect/>
             </a:stretch>
@@ -7953,12 +8043,12 @@
         </p:pic>
         <p:pic>
           <p:nvPicPr>
-            <p:cNvPr id="41" name="object 41" descr=""/>
+            <p:cNvPr id="41" name="object 41"/>
             <p:cNvPicPr/>
             <p:nvPr/>
           </p:nvPicPr>
           <p:blipFill>
-            <a:blip r:embed="rId18" cstate="print"/>
+            <a:blip r:embed="rId17" cstate="print"/>
             <a:stretch>
               <a:fillRect/>
             </a:stretch>
@@ -7975,7 +8065,7 @@
         </p:pic>
         <p:sp>
           <p:nvSpPr>
-            <p:cNvPr id="42" name="object 42" descr=""/>
+            <p:cNvPr id="42" name="object 42"/>
             <p:cNvSpPr/>
             <p:nvPr/>
           </p:nvSpPr>
@@ -8272,13 +8362,15 @@
           <p:txBody>
             <a:bodyPr wrap="square" lIns="0" tIns="0" rIns="0" bIns="0" rtlCol="0"/>
             <a:lstStyle/>
-            <a:p/>
+            <a:p>
+              <a:endParaRPr/>
+            </a:p>
           </p:txBody>
         </p:sp>
       </p:grpSp>
       <p:grpSp>
         <p:nvGrpSpPr>
-          <p:cNvPr id="43" name="object 43" descr=""/>
+          <p:cNvPr id="43" name="object 43"/>
           <p:cNvGrpSpPr/>
           <p:nvPr/>
         </p:nvGrpSpPr>
@@ -8292,7 +8384,7 @@
         </p:grpSpPr>
         <p:sp>
           <p:nvSpPr>
-            <p:cNvPr id="44" name="object 44" descr=""/>
+            <p:cNvPr id="44" name="object 44"/>
             <p:cNvSpPr/>
             <p:nvPr/>
           </p:nvSpPr>
@@ -8335,17 +8427,19 @@
           <p:txBody>
             <a:bodyPr wrap="square" lIns="0" tIns="0" rIns="0" bIns="0" rtlCol="0"/>
             <a:lstStyle/>
-            <a:p/>
+            <a:p>
+              <a:endParaRPr/>
+            </a:p>
           </p:txBody>
         </p:sp>
         <p:pic>
           <p:nvPicPr>
-            <p:cNvPr id="45" name="object 45" descr=""/>
+            <p:cNvPr id="45" name="object 45"/>
             <p:cNvPicPr/>
             <p:nvPr/>
           </p:nvPicPr>
           <p:blipFill>
-            <a:blip r:embed="rId19" cstate="print"/>
+            <a:blip r:embed="rId18" cstate="print"/>
             <a:stretch>
               <a:fillRect/>
             </a:stretch>
@@ -8362,12 +8456,12 @@
         </p:pic>
         <p:pic>
           <p:nvPicPr>
-            <p:cNvPr id="46" name="object 46" descr=""/>
+            <p:cNvPr id="46" name="object 46"/>
             <p:cNvPicPr/>
             <p:nvPr/>
           </p:nvPicPr>
           <p:blipFill>
-            <a:blip r:embed="rId20" cstate="print"/>
+            <a:blip r:embed="rId19" cstate="print"/>
             <a:stretch>
               <a:fillRect/>
             </a:stretch>
@@ -8384,7 +8478,7 @@
         </p:pic>
         <p:sp>
           <p:nvSpPr>
-            <p:cNvPr id="47" name="object 47" descr=""/>
+            <p:cNvPr id="47" name="object 47"/>
             <p:cNvSpPr/>
             <p:nvPr/>
           </p:nvSpPr>
@@ -9105,17 +9199,19 @@
           <p:txBody>
             <a:bodyPr wrap="square" lIns="0" tIns="0" rIns="0" bIns="0" rtlCol="0"/>
             <a:lstStyle/>
-            <a:p/>
+            <a:p>
+              <a:endParaRPr/>
+            </a:p>
           </p:txBody>
         </p:sp>
         <p:pic>
           <p:nvPicPr>
-            <p:cNvPr id="48" name="object 48" descr=""/>
+            <p:cNvPr id="48" name="object 48"/>
             <p:cNvPicPr/>
             <p:nvPr/>
           </p:nvPicPr>
           <p:blipFill>
-            <a:blip r:embed="rId3" cstate="print"/>
+            <a:blip r:embed="rId2" cstate="print"/>
             <a:stretch>
               <a:fillRect/>
             </a:stretch>
@@ -9132,7 +9228,7 @@
         </p:pic>
         <p:sp>
           <p:nvSpPr>
-            <p:cNvPr id="49" name="object 49" descr=""/>
+            <p:cNvPr id="49" name="object 49"/>
             <p:cNvSpPr/>
             <p:nvPr/>
           </p:nvSpPr>
@@ -9327,12 +9423,14 @@
           <p:txBody>
             <a:bodyPr wrap="square" lIns="0" tIns="0" rIns="0" bIns="0" rtlCol="0"/>
             <a:lstStyle/>
-            <a:p/>
+            <a:p>
+              <a:endParaRPr/>
+            </a:p>
           </p:txBody>
         </p:sp>
         <p:sp>
           <p:nvSpPr>
-            <p:cNvPr id="50" name="object 50" descr=""/>
+            <p:cNvPr id="50" name="object 50"/>
             <p:cNvSpPr/>
             <p:nvPr/>
           </p:nvSpPr>
@@ -9392,17 +9490,19 @@
           <p:txBody>
             <a:bodyPr wrap="square" lIns="0" tIns="0" rIns="0" bIns="0" rtlCol="0"/>
             <a:lstStyle/>
-            <a:p/>
+            <a:p>
+              <a:endParaRPr/>
+            </a:p>
           </p:txBody>
         </p:sp>
         <p:pic>
           <p:nvPicPr>
-            <p:cNvPr id="51" name="object 51" descr=""/>
+            <p:cNvPr id="51" name="object 51"/>
             <p:cNvPicPr/>
             <p:nvPr/>
           </p:nvPicPr>
           <p:blipFill>
-            <a:blip r:embed="rId21" cstate="print"/>
+            <a:blip r:embed="rId20" cstate="print"/>
             <a:stretch>
               <a:fillRect/>
             </a:stretch>
@@ -9419,7 +9519,7 @@
         </p:pic>
         <p:sp>
           <p:nvSpPr>
-            <p:cNvPr id="52" name="object 52" descr=""/>
+            <p:cNvPr id="52" name="object 52"/>
             <p:cNvSpPr/>
             <p:nvPr/>
           </p:nvSpPr>
@@ -9504,17 +9604,19 @@
           <p:txBody>
             <a:bodyPr wrap="square" lIns="0" tIns="0" rIns="0" bIns="0" rtlCol="0"/>
             <a:lstStyle/>
-            <a:p/>
+            <a:p>
+              <a:endParaRPr/>
+            </a:p>
           </p:txBody>
         </p:sp>
         <p:pic>
           <p:nvPicPr>
-            <p:cNvPr id="53" name="object 53" descr=""/>
+            <p:cNvPr id="53" name="object 53"/>
             <p:cNvPicPr/>
             <p:nvPr/>
           </p:nvPicPr>
           <p:blipFill>
-            <a:blip r:embed="rId22" cstate="print"/>
+            <a:blip r:embed="rId21" cstate="print"/>
             <a:stretch>
               <a:fillRect/>
             </a:stretch>
@@ -9531,7 +9633,7 @@
         </p:pic>
         <p:sp>
           <p:nvSpPr>
-            <p:cNvPr id="54" name="object 54" descr=""/>
+            <p:cNvPr id="54" name="object 54"/>
             <p:cNvSpPr/>
             <p:nvPr/>
           </p:nvSpPr>
@@ -10267,17 +10369,19 @@
           <p:txBody>
             <a:bodyPr wrap="square" lIns="0" tIns="0" rIns="0" bIns="0" rtlCol="0"/>
             <a:lstStyle/>
-            <a:p/>
+            <a:p>
+              <a:endParaRPr/>
+            </a:p>
           </p:txBody>
         </p:sp>
         <p:pic>
           <p:nvPicPr>
-            <p:cNvPr id="55" name="object 55" descr=""/>
+            <p:cNvPr id="55" name="object 55"/>
             <p:cNvPicPr/>
             <p:nvPr/>
           </p:nvPicPr>
           <p:blipFill>
-            <a:blip r:embed="rId23" cstate="print"/>
+            <a:blip r:embed="rId22" cstate="print"/>
             <a:stretch>
               <a:fillRect/>
             </a:stretch>
@@ -10294,7 +10398,7 @@
         </p:pic>
         <p:sp>
           <p:nvSpPr>
-            <p:cNvPr id="56" name="object 56" descr=""/>
+            <p:cNvPr id="56" name="object 56"/>
             <p:cNvSpPr/>
             <p:nvPr/>
           </p:nvSpPr>
@@ -11354,12 +11458,14 @@
           <p:txBody>
             <a:bodyPr wrap="square" lIns="0" tIns="0" rIns="0" bIns="0" rtlCol="0"/>
             <a:lstStyle/>
-            <a:p/>
+            <a:p>
+              <a:endParaRPr/>
+            </a:p>
           </p:txBody>
         </p:sp>
         <p:sp>
           <p:nvSpPr>
-            <p:cNvPr id="57" name="object 57" descr=""/>
+            <p:cNvPr id="57" name="object 57"/>
             <p:cNvSpPr/>
             <p:nvPr/>
           </p:nvSpPr>
@@ -11452,12 +11558,14 @@
           <p:txBody>
             <a:bodyPr wrap="square" lIns="0" tIns="0" rIns="0" bIns="0" rtlCol="0"/>
             <a:lstStyle/>
-            <a:p/>
+            <a:p>
+              <a:endParaRPr/>
+            </a:p>
           </p:txBody>
         </p:sp>
         <p:sp>
           <p:nvSpPr>
-            <p:cNvPr id="58" name="object 58" descr=""/>
+            <p:cNvPr id="58" name="object 58"/>
             <p:cNvSpPr/>
             <p:nvPr/>
           </p:nvSpPr>
@@ -11550,17 +11658,19 @@
           <p:txBody>
             <a:bodyPr wrap="square" lIns="0" tIns="0" rIns="0" bIns="0" rtlCol="0"/>
             <a:lstStyle/>
-            <a:p/>
+            <a:p>
+              <a:endParaRPr/>
+            </a:p>
           </p:txBody>
         </p:sp>
         <p:pic>
           <p:nvPicPr>
-            <p:cNvPr id="59" name="object 59" descr=""/>
+            <p:cNvPr id="59" name="object 59"/>
             <p:cNvPicPr/>
             <p:nvPr/>
           </p:nvPicPr>
           <p:blipFill>
-            <a:blip r:embed="rId24" cstate="print"/>
+            <a:blip r:embed="rId23" cstate="print"/>
             <a:stretch>
               <a:fillRect/>
             </a:stretch>
@@ -11577,7 +11687,7 @@
         </p:pic>
         <p:sp>
           <p:nvSpPr>
-            <p:cNvPr id="60" name="object 60" descr=""/>
+            <p:cNvPr id="60" name="object 60"/>
             <p:cNvSpPr/>
             <p:nvPr/>
           </p:nvSpPr>
@@ -11890,12 +12000,14 @@
           <p:txBody>
             <a:bodyPr wrap="square" lIns="0" tIns="0" rIns="0" bIns="0" rtlCol="0"/>
             <a:lstStyle/>
-            <a:p/>
+            <a:p>
+              <a:endParaRPr/>
+            </a:p>
           </p:txBody>
         </p:sp>
         <p:sp>
           <p:nvSpPr>
-            <p:cNvPr id="61" name="object 61" descr=""/>
+            <p:cNvPr id="61" name="object 61"/>
             <p:cNvSpPr/>
             <p:nvPr/>
           </p:nvSpPr>
@@ -11998,17 +12110,19 @@
           <p:txBody>
             <a:bodyPr wrap="square" lIns="0" tIns="0" rIns="0" bIns="0" rtlCol="0"/>
             <a:lstStyle/>
-            <a:p/>
+            <a:p>
+              <a:endParaRPr/>
+            </a:p>
           </p:txBody>
         </p:sp>
         <p:pic>
           <p:nvPicPr>
-            <p:cNvPr id="62" name="object 62" descr=""/>
+            <p:cNvPr id="62" name="object 62"/>
             <p:cNvPicPr/>
             <p:nvPr/>
           </p:nvPicPr>
           <p:blipFill>
-            <a:blip r:embed="rId16" cstate="print"/>
+            <a:blip r:embed="rId15" cstate="print"/>
             <a:stretch>
               <a:fillRect/>
             </a:stretch>
@@ -12025,12 +12139,12 @@
         </p:pic>
         <p:pic>
           <p:nvPicPr>
-            <p:cNvPr id="63" name="object 63" descr=""/>
+            <p:cNvPr id="63" name="object 63"/>
             <p:cNvPicPr/>
             <p:nvPr/>
           </p:nvPicPr>
           <p:blipFill>
-            <a:blip r:embed="rId25" cstate="print"/>
+            <a:blip r:embed="rId24" cstate="print"/>
             <a:stretch>
               <a:fillRect/>
             </a:stretch>
@@ -12047,12 +12161,12 @@
         </p:pic>
         <p:pic>
           <p:nvPicPr>
-            <p:cNvPr id="64" name="object 64" descr=""/>
+            <p:cNvPr id="64" name="object 64"/>
             <p:cNvPicPr/>
             <p:nvPr/>
           </p:nvPicPr>
           <p:blipFill>
-            <a:blip r:embed="rId26" cstate="print"/>
+            <a:blip r:embed="rId25" cstate="print"/>
             <a:stretch>
               <a:fillRect/>
             </a:stretch>
@@ -12069,7 +12183,7 @@
         </p:pic>
         <p:sp>
           <p:nvSpPr>
-            <p:cNvPr id="65" name="object 65" descr=""/>
+            <p:cNvPr id="65" name="object 65"/>
             <p:cNvSpPr/>
             <p:nvPr/>
           </p:nvSpPr>
@@ -12366,12 +12480,14 @@
           <p:txBody>
             <a:bodyPr wrap="square" lIns="0" tIns="0" rIns="0" bIns="0" rtlCol="0"/>
             <a:lstStyle/>
-            <a:p/>
+            <a:p>
+              <a:endParaRPr/>
+            </a:p>
           </p:txBody>
         </p:sp>
         <p:sp>
           <p:nvSpPr>
-            <p:cNvPr id="66" name="object 66" descr=""/>
+            <p:cNvPr id="66" name="object 66"/>
             <p:cNvSpPr/>
             <p:nvPr/>
           </p:nvSpPr>
@@ -12456,17 +12572,19 @@
           <p:txBody>
             <a:bodyPr wrap="square" lIns="0" tIns="0" rIns="0" bIns="0" rtlCol="0"/>
             <a:lstStyle/>
-            <a:p/>
+            <a:p>
+              <a:endParaRPr/>
+            </a:p>
           </p:txBody>
         </p:sp>
         <p:pic>
           <p:nvPicPr>
-            <p:cNvPr id="67" name="object 67" descr=""/>
+            <p:cNvPr id="67" name="object 67"/>
             <p:cNvPicPr/>
             <p:nvPr/>
           </p:nvPicPr>
           <p:blipFill>
-            <a:blip r:embed="rId27" cstate="print"/>
+            <a:blip r:embed="rId26" cstate="print"/>
             <a:stretch>
               <a:fillRect/>
             </a:stretch>
@@ -12483,12 +12601,12 @@
         </p:pic>
         <p:pic>
           <p:nvPicPr>
-            <p:cNvPr id="68" name="object 68" descr=""/>
+            <p:cNvPr id="68" name="object 68"/>
             <p:cNvPicPr/>
             <p:nvPr/>
           </p:nvPicPr>
           <p:blipFill>
-            <a:blip r:embed="rId28" cstate="print"/>
+            <a:blip r:embed="rId27" cstate="print"/>
             <a:stretch>
               <a:fillRect/>
             </a:stretch>
@@ -12505,12 +12623,12 @@
         </p:pic>
         <p:pic>
           <p:nvPicPr>
-            <p:cNvPr id="69" name="object 69" descr=""/>
+            <p:cNvPr id="69" name="object 69"/>
             <p:cNvPicPr/>
             <p:nvPr/>
           </p:nvPicPr>
           <p:blipFill>
-            <a:blip r:embed="rId29" cstate="print"/>
+            <a:blip r:embed="rId28" cstate="print"/>
             <a:stretch>
               <a:fillRect/>
             </a:stretch>
@@ -12527,12 +12645,12 @@
         </p:pic>
         <p:pic>
           <p:nvPicPr>
-            <p:cNvPr id="70" name="object 70" descr=""/>
+            <p:cNvPr id="70" name="object 70"/>
             <p:cNvPicPr/>
             <p:nvPr/>
           </p:nvPicPr>
           <p:blipFill>
-            <a:blip r:embed="rId30" cstate="print"/>
+            <a:blip r:embed="rId29" cstate="print"/>
             <a:stretch>
               <a:fillRect/>
             </a:stretch>
@@ -12549,7 +12667,7 @@
         </p:pic>
         <p:sp>
           <p:nvSpPr>
-            <p:cNvPr id="71" name="object 71" descr=""/>
+            <p:cNvPr id="71" name="object 71"/>
             <p:cNvSpPr/>
             <p:nvPr/>
           </p:nvSpPr>
@@ -12670,17 +12788,19 @@
           <p:txBody>
             <a:bodyPr wrap="square" lIns="0" tIns="0" rIns="0" bIns="0" rtlCol="0"/>
             <a:lstStyle/>
-            <a:p/>
+            <a:p>
+              <a:endParaRPr/>
+            </a:p>
           </p:txBody>
         </p:sp>
         <p:pic>
           <p:nvPicPr>
-            <p:cNvPr id="72" name="object 72" descr=""/>
+            <p:cNvPr id="72" name="object 72"/>
             <p:cNvPicPr/>
             <p:nvPr/>
           </p:nvPicPr>
           <p:blipFill>
-            <a:blip r:embed="rId31" cstate="print"/>
+            <a:blip r:embed="rId30" cstate="print"/>
             <a:stretch>
               <a:fillRect/>
             </a:stretch>
@@ -12697,12 +12817,12 @@
         </p:pic>
         <p:pic>
           <p:nvPicPr>
-            <p:cNvPr id="73" name="object 73" descr=""/>
+            <p:cNvPr id="73" name="object 73"/>
             <p:cNvPicPr/>
             <p:nvPr/>
           </p:nvPicPr>
           <p:blipFill>
-            <a:blip r:embed="rId32" cstate="print"/>
+            <a:blip r:embed="rId31" cstate="print"/>
             <a:stretch>
               <a:fillRect/>
             </a:stretch>
@@ -12719,7 +12839,7 @@
         </p:pic>
         <p:sp>
           <p:nvSpPr>
-            <p:cNvPr id="74" name="object 74" descr=""/>
+            <p:cNvPr id="74" name="object 74"/>
             <p:cNvSpPr/>
             <p:nvPr/>
           </p:nvSpPr>
@@ -12855,17 +12975,19 @@
           <p:txBody>
             <a:bodyPr wrap="square" lIns="0" tIns="0" rIns="0" bIns="0" rtlCol="0"/>
             <a:lstStyle/>
-            <a:p/>
+            <a:p>
+              <a:endParaRPr/>
+            </a:p>
           </p:txBody>
         </p:sp>
         <p:pic>
           <p:nvPicPr>
-            <p:cNvPr id="75" name="object 75" descr=""/>
+            <p:cNvPr id="75" name="object 75"/>
             <p:cNvPicPr/>
             <p:nvPr/>
           </p:nvPicPr>
           <p:blipFill>
-            <a:blip r:embed="rId33" cstate="print"/>
+            <a:blip r:embed="rId32" cstate="print"/>
             <a:stretch>
               <a:fillRect/>
             </a:stretch>
@@ -12882,12 +13004,12 @@
         </p:pic>
         <p:pic>
           <p:nvPicPr>
-            <p:cNvPr id="76" name="object 76" descr=""/>
+            <p:cNvPr id="76" name="object 76"/>
             <p:cNvPicPr/>
             <p:nvPr/>
           </p:nvPicPr>
           <p:blipFill>
-            <a:blip r:embed="rId34" cstate="print"/>
+            <a:blip r:embed="rId33" cstate="print"/>
             <a:stretch>
               <a:fillRect/>
             </a:stretch>
@@ -12904,7 +13026,7 @@
         </p:pic>
         <p:sp>
           <p:nvSpPr>
-            <p:cNvPr id="77" name="object 77" descr=""/>
+            <p:cNvPr id="77" name="object 77"/>
             <p:cNvSpPr/>
             <p:nvPr/>
           </p:nvSpPr>
@@ -13034,17 +13156,19 @@
           <p:txBody>
             <a:bodyPr wrap="square" lIns="0" tIns="0" rIns="0" bIns="0" rtlCol="0"/>
             <a:lstStyle/>
-            <a:p/>
+            <a:p>
+              <a:endParaRPr/>
+            </a:p>
           </p:txBody>
         </p:sp>
         <p:pic>
           <p:nvPicPr>
-            <p:cNvPr id="78" name="object 78" descr=""/>
+            <p:cNvPr id="78" name="object 78"/>
             <p:cNvPicPr/>
             <p:nvPr/>
           </p:nvPicPr>
           <p:blipFill>
-            <a:blip r:embed="rId35" cstate="print"/>
+            <a:blip r:embed="rId34" cstate="print"/>
             <a:stretch>
               <a:fillRect/>
             </a:stretch>
@@ -13061,12 +13185,12 @@
         </p:pic>
         <p:pic>
           <p:nvPicPr>
-            <p:cNvPr id="79" name="object 79" descr=""/>
+            <p:cNvPr id="79" name="object 79"/>
             <p:cNvPicPr/>
             <p:nvPr/>
           </p:nvPicPr>
           <p:blipFill>
-            <a:blip r:embed="rId36" cstate="print"/>
+            <a:blip r:embed="rId35" cstate="print"/>
             <a:stretch>
               <a:fillRect/>
             </a:stretch>
@@ -13083,7 +13207,7 @@
         </p:pic>
         <p:sp>
           <p:nvSpPr>
-            <p:cNvPr id="80" name="object 80" descr=""/>
+            <p:cNvPr id="80" name="object 80"/>
             <p:cNvSpPr/>
             <p:nvPr/>
           </p:nvSpPr>
@@ -13198,17 +13322,19 @@
           <p:txBody>
             <a:bodyPr wrap="square" lIns="0" tIns="0" rIns="0" bIns="0" rtlCol="0"/>
             <a:lstStyle/>
-            <a:p/>
+            <a:p>
+              <a:endParaRPr/>
+            </a:p>
           </p:txBody>
         </p:sp>
         <p:pic>
           <p:nvPicPr>
-            <p:cNvPr id="81" name="object 81" descr=""/>
+            <p:cNvPr id="81" name="object 81"/>
             <p:cNvPicPr/>
             <p:nvPr/>
           </p:nvPicPr>
           <p:blipFill>
-            <a:blip r:embed="rId37" cstate="print"/>
+            <a:blip r:embed="rId36" cstate="print"/>
             <a:stretch>
               <a:fillRect/>
             </a:stretch>
@@ -13225,12 +13351,12 @@
         </p:pic>
         <p:pic>
           <p:nvPicPr>
-            <p:cNvPr id="82" name="object 82" descr=""/>
+            <p:cNvPr id="82" name="object 82"/>
             <p:cNvPicPr/>
             <p:nvPr/>
           </p:nvPicPr>
           <p:blipFill>
-            <a:blip r:embed="rId38" cstate="print"/>
+            <a:blip r:embed="rId37" cstate="print"/>
             <a:stretch>
               <a:fillRect/>
             </a:stretch>
@@ -13247,7 +13373,7 @@
         </p:pic>
         <p:sp>
           <p:nvSpPr>
-            <p:cNvPr id="83" name="object 83" descr=""/>
+            <p:cNvPr id="83" name="object 83"/>
             <p:cNvSpPr/>
             <p:nvPr/>
           </p:nvSpPr>
@@ -13365,17 +13491,19 @@
           <p:txBody>
             <a:bodyPr wrap="square" lIns="0" tIns="0" rIns="0" bIns="0" rtlCol="0"/>
             <a:lstStyle/>
-            <a:p/>
+            <a:p>
+              <a:endParaRPr/>
+            </a:p>
           </p:txBody>
         </p:sp>
         <p:pic>
           <p:nvPicPr>
-            <p:cNvPr id="84" name="object 84" descr=""/>
+            <p:cNvPr id="84" name="object 84"/>
             <p:cNvPicPr/>
             <p:nvPr/>
           </p:nvPicPr>
           <p:blipFill>
-            <a:blip r:embed="rId39" cstate="print"/>
+            <a:blip r:embed="rId38" cstate="print"/>
             <a:stretch>
               <a:fillRect/>
             </a:stretch>
@@ -13392,12 +13520,12 @@
         </p:pic>
         <p:pic>
           <p:nvPicPr>
-            <p:cNvPr id="85" name="object 85" descr=""/>
+            <p:cNvPr id="85" name="object 85"/>
             <p:cNvPicPr/>
             <p:nvPr/>
           </p:nvPicPr>
           <p:blipFill>
-            <a:blip r:embed="rId40" cstate="print"/>
+            <a:blip r:embed="rId39" cstate="print"/>
             <a:stretch>
               <a:fillRect/>
             </a:stretch>
@@ -13414,7 +13542,7 @@
         </p:pic>
         <p:sp>
           <p:nvSpPr>
-            <p:cNvPr id="86" name="object 86" descr=""/>
+            <p:cNvPr id="86" name="object 86"/>
             <p:cNvSpPr/>
             <p:nvPr/>
           </p:nvSpPr>
@@ -13547,17 +13675,19 @@
           <p:txBody>
             <a:bodyPr wrap="square" lIns="0" tIns="0" rIns="0" bIns="0" rtlCol="0"/>
             <a:lstStyle/>
-            <a:p/>
+            <a:p>
+              <a:endParaRPr/>
+            </a:p>
           </p:txBody>
         </p:sp>
         <p:pic>
           <p:nvPicPr>
-            <p:cNvPr id="87" name="object 87" descr=""/>
+            <p:cNvPr id="87" name="object 87"/>
             <p:cNvPicPr/>
             <p:nvPr/>
           </p:nvPicPr>
           <p:blipFill>
-            <a:blip r:embed="rId41" cstate="print"/>
+            <a:blip r:embed="rId40" cstate="print"/>
             <a:stretch>
               <a:fillRect/>
             </a:stretch>
@@ -13574,12 +13704,12 @@
         </p:pic>
         <p:pic>
           <p:nvPicPr>
-            <p:cNvPr id="88" name="object 88" descr=""/>
+            <p:cNvPr id="88" name="object 88"/>
             <p:cNvPicPr/>
             <p:nvPr/>
           </p:nvPicPr>
           <p:blipFill>
-            <a:blip r:embed="rId42" cstate="print"/>
+            <a:blip r:embed="rId41" cstate="print"/>
             <a:stretch>
               <a:fillRect/>
             </a:stretch>
@@ -13596,7 +13726,7 @@
         </p:pic>
         <p:sp>
           <p:nvSpPr>
-            <p:cNvPr id="89" name="object 89" descr=""/>
+            <p:cNvPr id="89" name="object 89"/>
             <p:cNvSpPr/>
             <p:nvPr/>
           </p:nvSpPr>
@@ -13714,17 +13844,19 @@
           <p:txBody>
             <a:bodyPr wrap="square" lIns="0" tIns="0" rIns="0" bIns="0" rtlCol="0"/>
             <a:lstStyle/>
-            <a:p/>
+            <a:p>
+              <a:endParaRPr/>
+            </a:p>
           </p:txBody>
         </p:sp>
         <p:pic>
           <p:nvPicPr>
-            <p:cNvPr id="90" name="object 90" descr=""/>
+            <p:cNvPr id="90" name="object 90"/>
             <p:cNvPicPr/>
             <p:nvPr/>
           </p:nvPicPr>
           <p:blipFill>
-            <a:blip r:embed="rId43" cstate="print"/>
+            <a:blip r:embed="rId42" cstate="print"/>
             <a:stretch>
               <a:fillRect/>
             </a:stretch>
@@ -13741,12 +13873,12 @@
         </p:pic>
         <p:pic>
           <p:nvPicPr>
-            <p:cNvPr id="91" name="object 91" descr=""/>
+            <p:cNvPr id="91" name="object 91"/>
             <p:cNvPicPr/>
             <p:nvPr/>
           </p:nvPicPr>
           <p:blipFill>
-            <a:blip r:embed="rId44" cstate="print"/>
+            <a:blip r:embed="rId43" cstate="print"/>
             <a:stretch>
               <a:fillRect/>
             </a:stretch>
@@ -13763,7 +13895,7 @@
         </p:pic>
         <p:sp>
           <p:nvSpPr>
-            <p:cNvPr id="92" name="object 92" descr=""/>
+            <p:cNvPr id="92" name="object 92"/>
             <p:cNvSpPr/>
             <p:nvPr/>
           </p:nvSpPr>
@@ -13881,17 +14013,19 @@
           <p:txBody>
             <a:bodyPr wrap="square" lIns="0" tIns="0" rIns="0" bIns="0" rtlCol="0"/>
             <a:lstStyle/>
-            <a:p/>
+            <a:p>
+              <a:endParaRPr/>
+            </a:p>
           </p:txBody>
         </p:sp>
         <p:pic>
           <p:nvPicPr>
-            <p:cNvPr id="93" name="object 93" descr=""/>
+            <p:cNvPr id="93" name="object 93"/>
             <p:cNvPicPr/>
             <p:nvPr/>
           </p:nvPicPr>
           <p:blipFill>
-            <a:blip r:embed="rId45" cstate="print"/>
+            <a:blip r:embed="rId44" cstate="print"/>
             <a:stretch>
               <a:fillRect/>
             </a:stretch>
@@ -13908,12 +14042,12 @@
         </p:pic>
         <p:pic>
           <p:nvPicPr>
-            <p:cNvPr id="94" name="object 94" descr=""/>
+            <p:cNvPr id="94" name="object 94"/>
             <p:cNvPicPr/>
             <p:nvPr/>
           </p:nvPicPr>
           <p:blipFill>
-            <a:blip r:embed="rId46" cstate="print"/>
+            <a:blip r:embed="rId45" cstate="print"/>
             <a:stretch>
               <a:fillRect/>
             </a:stretch>
@@ -13930,7 +14064,7 @@
         </p:pic>
         <p:sp>
           <p:nvSpPr>
-            <p:cNvPr id="95" name="object 95" descr=""/>
+            <p:cNvPr id="95" name="object 95"/>
             <p:cNvSpPr/>
             <p:nvPr/>
           </p:nvSpPr>
@@ -14060,17 +14194,19 @@
           <p:txBody>
             <a:bodyPr wrap="square" lIns="0" tIns="0" rIns="0" bIns="0" rtlCol="0"/>
             <a:lstStyle/>
-            <a:p/>
+            <a:p>
+              <a:endParaRPr/>
+            </a:p>
           </p:txBody>
         </p:sp>
         <p:pic>
           <p:nvPicPr>
-            <p:cNvPr id="96" name="object 96" descr=""/>
+            <p:cNvPr id="96" name="object 96"/>
             <p:cNvPicPr/>
             <p:nvPr/>
           </p:nvPicPr>
           <p:blipFill>
-            <a:blip r:embed="rId47" cstate="print"/>
+            <a:blip r:embed="rId46" cstate="print"/>
             <a:stretch>
               <a:fillRect/>
             </a:stretch>
@@ -14087,12 +14223,12 @@
         </p:pic>
         <p:pic>
           <p:nvPicPr>
-            <p:cNvPr id="97" name="object 97" descr=""/>
+            <p:cNvPr id="97" name="object 97"/>
             <p:cNvPicPr/>
             <p:nvPr/>
           </p:nvPicPr>
           <p:blipFill>
-            <a:blip r:embed="rId48" cstate="print"/>
+            <a:blip r:embed="rId47" cstate="print"/>
             <a:stretch>
               <a:fillRect/>
             </a:stretch>
@@ -14109,7 +14245,7 @@
         </p:pic>
         <p:sp>
           <p:nvSpPr>
-            <p:cNvPr id="98" name="object 98" descr=""/>
+            <p:cNvPr id="98" name="object 98"/>
             <p:cNvSpPr/>
             <p:nvPr/>
           </p:nvSpPr>
@@ -14254,17 +14390,19 @@
           <p:txBody>
             <a:bodyPr wrap="square" lIns="0" tIns="0" rIns="0" bIns="0" rtlCol="0"/>
             <a:lstStyle/>
-            <a:p/>
+            <a:p>
+              <a:endParaRPr/>
+            </a:p>
           </p:txBody>
         </p:sp>
         <p:pic>
           <p:nvPicPr>
-            <p:cNvPr id="99" name="object 99" descr=""/>
+            <p:cNvPr id="99" name="object 99"/>
             <p:cNvPicPr/>
             <p:nvPr/>
           </p:nvPicPr>
           <p:blipFill>
-            <a:blip r:embed="rId49" cstate="print"/>
+            <a:blip r:embed="rId48" cstate="print"/>
             <a:stretch>
               <a:fillRect/>
             </a:stretch>
@@ -14281,12 +14419,12 @@
         </p:pic>
         <p:pic>
           <p:nvPicPr>
-            <p:cNvPr id="100" name="object 100" descr=""/>
+            <p:cNvPr id="100" name="object 100"/>
             <p:cNvPicPr/>
             <p:nvPr/>
           </p:nvPicPr>
           <p:blipFill>
-            <a:blip r:embed="rId50" cstate="print"/>
+            <a:blip r:embed="rId49" cstate="print"/>
             <a:stretch>
               <a:fillRect/>
             </a:stretch>
@@ -14303,7 +14441,7 @@
         </p:pic>
         <p:sp>
           <p:nvSpPr>
-            <p:cNvPr id="101" name="object 101" descr=""/>
+            <p:cNvPr id="101" name="object 101"/>
             <p:cNvSpPr/>
             <p:nvPr/>
           </p:nvSpPr>
@@ -14421,17 +14559,19 @@
           <p:txBody>
             <a:bodyPr wrap="square" lIns="0" tIns="0" rIns="0" bIns="0" rtlCol="0"/>
             <a:lstStyle/>
-            <a:p/>
+            <a:p>
+              <a:endParaRPr/>
+            </a:p>
           </p:txBody>
         </p:sp>
         <p:pic>
           <p:nvPicPr>
-            <p:cNvPr id="102" name="object 102" descr=""/>
+            <p:cNvPr id="102" name="object 102"/>
             <p:cNvPicPr/>
             <p:nvPr/>
           </p:nvPicPr>
           <p:blipFill>
-            <a:blip r:embed="rId51" cstate="print"/>
+            <a:blip r:embed="rId50" cstate="print"/>
             <a:stretch>
               <a:fillRect/>
             </a:stretch>
@@ -14448,12 +14588,12 @@
         </p:pic>
         <p:pic>
           <p:nvPicPr>
-            <p:cNvPr id="103" name="object 103" descr=""/>
+            <p:cNvPr id="103" name="object 103"/>
             <p:cNvPicPr/>
             <p:nvPr/>
           </p:nvPicPr>
           <p:blipFill>
-            <a:blip r:embed="rId52" cstate="print"/>
+            <a:blip r:embed="rId51" cstate="print"/>
             <a:stretch>
               <a:fillRect/>
             </a:stretch>
@@ -14470,7 +14610,7 @@
         </p:pic>
         <p:sp>
           <p:nvSpPr>
-            <p:cNvPr id="104" name="object 104" descr=""/>
+            <p:cNvPr id="104" name="object 104"/>
             <p:cNvSpPr/>
             <p:nvPr/>
           </p:nvSpPr>
@@ -14588,17 +14728,19 @@
           <p:txBody>
             <a:bodyPr wrap="square" lIns="0" tIns="0" rIns="0" bIns="0" rtlCol="0"/>
             <a:lstStyle/>
-            <a:p/>
+            <a:p>
+              <a:endParaRPr/>
+            </a:p>
           </p:txBody>
         </p:sp>
         <p:pic>
           <p:nvPicPr>
-            <p:cNvPr id="105" name="object 105" descr=""/>
+            <p:cNvPr id="105" name="object 105"/>
             <p:cNvPicPr/>
             <p:nvPr/>
           </p:nvPicPr>
           <p:blipFill>
-            <a:blip r:embed="rId53" cstate="print"/>
+            <a:blip r:embed="rId52" cstate="print"/>
             <a:stretch>
               <a:fillRect/>
             </a:stretch>
@@ -14616,7 +14758,7 @@
       </p:grpSp>
       <p:grpSp>
         <p:nvGrpSpPr>
-          <p:cNvPr id="106" name="object 106" descr=""/>
+          <p:cNvPr id="106" name="object 106"/>
           <p:cNvGrpSpPr/>
           <p:nvPr/>
         </p:nvGrpSpPr>
@@ -14630,7 +14772,7 @@
         </p:grpSpPr>
         <p:sp>
           <p:nvSpPr>
-            <p:cNvPr id="107" name="object 107" descr=""/>
+            <p:cNvPr id="107" name="object 107"/>
             <p:cNvSpPr/>
             <p:nvPr/>
           </p:nvSpPr>
@@ -14673,17 +14815,19 @@
           <p:txBody>
             <a:bodyPr wrap="square" lIns="0" tIns="0" rIns="0" bIns="0" rtlCol="0"/>
             <a:lstStyle/>
-            <a:p/>
+            <a:p>
+              <a:endParaRPr/>
+            </a:p>
           </p:txBody>
         </p:sp>
         <p:pic>
           <p:nvPicPr>
-            <p:cNvPr id="108" name="object 108" descr=""/>
+            <p:cNvPr id="108" name="object 108"/>
             <p:cNvPicPr/>
             <p:nvPr/>
           </p:nvPicPr>
           <p:blipFill>
-            <a:blip r:embed="rId54" cstate="print"/>
+            <a:blip r:embed="rId53" cstate="print"/>
             <a:stretch>
               <a:fillRect/>
             </a:stretch>
@@ -14701,12 +14845,12 @@
       </p:grpSp>
       <p:pic>
         <p:nvPicPr>
-          <p:cNvPr id="109" name="object 109" descr=""/>
+          <p:cNvPr id="109" name="object 109"/>
           <p:cNvPicPr/>
           <p:nvPr/>
         </p:nvPicPr>
         <p:blipFill>
-          <a:blip r:embed="rId20" cstate="print"/>
+          <a:blip r:embed="rId19" cstate="print"/>
           <a:stretch>
             <a:fillRect/>
           </a:stretch>
@@ -14723,7 +14867,7 @@
       </p:pic>
       <p:graphicFrame>
         <p:nvGraphicFramePr>
-          <p:cNvPr id="110" name="object 110" descr=""/>
+          <p:cNvPr id="110" name="object 110"/>
           <p:cNvGraphicFramePr>
             <a:graphicFrameLocks noGrp="1"/>
           </p:cNvGraphicFramePr>
@@ -14731,7 +14875,7 @@
         </p:nvGraphicFramePr>
         <p:xfrm>
           <a:off x="15730025" y="3510833"/>
-          <a:ext cx="3463290" cy="4296410"/>
+          <a:ext cx="3376929" cy="4296409"/>
         </p:xfrm>
         <a:graphic>
           <a:graphicData uri="http://schemas.openxmlformats.org/drawingml/2006/table">
@@ -14740,9 +14884,27 @@
                 <a:tableStyleId>{2D5ABB26-0587-4C30-8999-92F81FD0307C}</a:tableStyleId>
               </a:tblPr>
               <a:tblGrid>
-                <a:gridCol w="1129030"/>
-                <a:gridCol w="1176655"/>
-                <a:gridCol w="1071244"/>
+                <a:gridCol w="1129030">
+                  <a:extLst>
+                    <a:ext uri="{9D8B030D-6E8A-4147-A177-3AD203B41FA5}">
+                      <a16:colId xmlns:a16="http://schemas.microsoft.com/office/drawing/2014/main" val="20000"/>
+                    </a:ext>
+                  </a:extLst>
+                </a:gridCol>
+                <a:gridCol w="1176655">
+                  <a:extLst>
+                    <a:ext uri="{9D8B030D-6E8A-4147-A177-3AD203B41FA5}">
+                      <a16:colId xmlns:a16="http://schemas.microsoft.com/office/drawing/2014/main" val="20001"/>
+                    </a:ext>
+                  </a:extLst>
+                </a:gridCol>
+                <a:gridCol w="1071244">
+                  <a:extLst>
+                    <a:ext uri="{9D8B030D-6E8A-4147-A177-3AD203B41FA5}">
+                      <a16:colId xmlns:a16="http://schemas.microsoft.com/office/drawing/2014/main" val="20002"/>
+                    </a:ext>
+                  </a:extLst>
+                </a:gridCol>
               </a:tblGrid>
               <a:tr h="1226185">
                 <a:tc>
@@ -14761,7 +14923,7 @@
                       </a:endParaRPr>
                     </a:p>
                   </a:txBody>
-                  <a:tcPr marL="0" marR="0" marB="0" marT="0">
+                  <a:tcPr marL="0" marR="0" marT="0" marB="0">
                     <a:lnL w="12700">
                       <a:solidFill>
                         <a:srgbClr val="000000"/>
@@ -14804,7 +14966,7 @@
                       </a:endParaRPr>
                     </a:p>
                   </a:txBody>
-                  <a:tcPr marL="0" marR="0" marB="0" marT="0">
+                  <a:tcPr marL="0" marR="0" marT="0" marB="0">
                     <a:lnL w="12700">
                       <a:solidFill>
                         <a:srgbClr val="000000"/>
@@ -14847,7 +15009,7 @@
                       </a:endParaRPr>
                     </a:p>
                   </a:txBody>
-                  <a:tcPr marL="0" marR="0" marB="0" marT="0">
+                  <a:tcPr marL="0" marR="0" marT="0" marB="0">
                     <a:lnL w="28575">
                       <a:solidFill>
                         <a:srgbClr val="000000"/>
@@ -14874,6 +15036,11 @@
                     </a:lnB>
                   </a:tcPr>
                 </a:tc>
+                <a:extLst>
+                  <a:ext uri="{0D108BD9-81ED-4DB2-BD59-A6C34878D82A}">
+                    <a16:rowId xmlns:a16="http://schemas.microsoft.com/office/drawing/2014/main" val="10000"/>
+                  </a:ext>
+                </a:extLst>
               </a:tr>
               <a:tr h="1058545">
                 <a:tc>
@@ -14892,7 +15059,7 @@
                       </a:endParaRPr>
                     </a:p>
                   </a:txBody>
-                  <a:tcPr marL="0" marR="0" marB="0" marT="0">
+                  <a:tcPr marL="0" marR="0" marT="0" marB="0">
                     <a:lnL w="12700">
                       <a:solidFill>
                         <a:srgbClr val="000000"/>
@@ -14935,7 +15102,7 @@
                       </a:endParaRPr>
                     </a:p>
                   </a:txBody>
-                  <a:tcPr marL="0" marR="0" marB="0" marT="0">
+                  <a:tcPr marL="0" marR="0" marT="0" marB="0">
                     <a:lnL w="12700">
                       <a:solidFill>
                         <a:srgbClr val="000000"/>
@@ -14978,7 +15145,7 @@
                       </a:endParaRPr>
                     </a:p>
                   </a:txBody>
-                  <a:tcPr marL="0" marR="0" marB="0" marT="0">
+                  <a:tcPr marL="0" marR="0" marT="0" marB="0">
                     <a:lnL w="12700">
                       <a:solidFill>
                         <a:srgbClr val="000000"/>
@@ -15005,6 +15172,11 @@
                     </a:lnB>
                   </a:tcPr>
                 </a:tc>
+                <a:extLst>
+                  <a:ext uri="{0D108BD9-81ED-4DB2-BD59-A6C34878D82A}">
+                    <a16:rowId xmlns:a16="http://schemas.microsoft.com/office/drawing/2014/main" val="10001"/>
+                  </a:ext>
+                </a:extLst>
               </a:tr>
               <a:tr h="1026794">
                 <a:tc>
@@ -15023,7 +15195,7 @@
                       </a:endParaRPr>
                     </a:p>
                   </a:txBody>
-                  <a:tcPr marL="0" marR="0" marB="0" marT="0">
+                  <a:tcPr marL="0" marR="0" marT="0" marB="0">
                     <a:lnL w="12700">
                       <a:solidFill>
                         <a:srgbClr val="000000"/>
@@ -15066,7 +15238,7 @@
                       </a:endParaRPr>
                     </a:p>
                   </a:txBody>
-                  <a:tcPr marL="0" marR="0" marB="0" marT="0">
+                  <a:tcPr marL="0" marR="0" marT="0" marB="0">
                     <a:lnL w="12700">
                       <a:solidFill>
                         <a:srgbClr val="000000"/>
@@ -15109,7 +15281,7 @@
                       </a:endParaRPr>
                     </a:p>
                   </a:txBody>
-                  <a:tcPr marL="0" marR="0" marB="0" marT="0">
+                  <a:tcPr marL="0" marR="0" marT="0" marB="0">
                     <a:lnL w="12700">
                       <a:solidFill>
                         <a:srgbClr val="000000"/>
@@ -15136,6 +15308,11 @@
                     </a:lnB>
                   </a:tcPr>
                 </a:tc>
+                <a:extLst>
+                  <a:ext uri="{0D108BD9-81ED-4DB2-BD59-A6C34878D82A}">
+                    <a16:rowId xmlns:a16="http://schemas.microsoft.com/office/drawing/2014/main" val="10002"/>
+                  </a:ext>
+                </a:extLst>
               </a:tr>
               <a:tr h="984885">
                 <a:tc>
@@ -15154,7 +15331,7 @@
                       </a:endParaRPr>
                     </a:p>
                   </a:txBody>
-                  <a:tcPr marL="0" marR="0" marB="0" marT="0">
+                  <a:tcPr marL="0" marR="0" marT="0" marB="0">
                     <a:lnL w="12700">
                       <a:solidFill>
                         <a:srgbClr val="000000"/>
@@ -15197,7 +15374,7 @@
                       </a:endParaRPr>
                     </a:p>
                   </a:txBody>
-                  <a:tcPr marL="0" marR="0" marB="0" marT="0">
+                  <a:tcPr marL="0" marR="0" marT="0" marB="0">
                     <a:lnL w="12700">
                       <a:solidFill>
                         <a:srgbClr val="000000"/>
@@ -15240,7 +15417,7 @@
                       </a:endParaRPr>
                     </a:p>
                   </a:txBody>
-                  <a:tcPr marL="0" marR="0" marB="0" marT="0">
+                  <a:tcPr marL="0" marR="0" marT="0" marB="0">
                     <a:lnL w="12700">
                       <a:solidFill>
                         <a:srgbClr val="000000"/>
@@ -15267,6 +15444,11 @@
                     </a:lnB>
                   </a:tcPr>
                 </a:tc>
+                <a:extLst>
+                  <a:ext uri="{0D108BD9-81ED-4DB2-BD59-A6C34878D82A}">
+                    <a16:rowId xmlns:a16="http://schemas.microsoft.com/office/drawing/2014/main" val="10003"/>
+                  </a:ext>
+                </a:extLst>
               </a:tr>
             </a:tbl>
           </a:graphicData>
@@ -15274,7 +15456,7 @@
       </p:graphicFrame>
       <p:sp>
         <p:nvSpPr>
-          <p:cNvPr id="111" name="object 111" descr=""/>
+          <p:cNvPr id="111" name="object 111"/>
           <p:cNvSpPr/>
           <p:nvPr/>
         </p:nvSpPr>
@@ -15710,12 +15892,14 @@
         <p:txBody>
           <a:bodyPr wrap="square" lIns="0" tIns="0" rIns="0" bIns="0" rtlCol="0"/>
           <a:lstStyle/>
-          <a:p/>
+          <a:p>
+            <a:endParaRPr/>
+          </a:p>
         </p:txBody>
       </p:sp>
       <p:sp>
         <p:nvSpPr>
-          <p:cNvPr id="112" name="object 112" descr=""/>
+          <p:cNvPr id="112" name="object 112"/>
           <p:cNvSpPr/>
           <p:nvPr/>
         </p:nvSpPr>
@@ -15842,12 +16026,14 @@
         <p:txBody>
           <a:bodyPr wrap="square" lIns="0" tIns="0" rIns="0" bIns="0" rtlCol="0"/>
           <a:lstStyle/>
-          <a:p/>
+          <a:p>
+            <a:endParaRPr/>
+          </a:p>
         </p:txBody>
       </p:sp>
       <p:sp>
         <p:nvSpPr>
-          <p:cNvPr id="113" name="object 113" descr=""/>
+          <p:cNvPr id="113" name="object 113"/>
           <p:cNvSpPr/>
           <p:nvPr/>
         </p:nvSpPr>
@@ -16004,17 +16190,19 @@
         <p:txBody>
           <a:bodyPr wrap="square" lIns="0" tIns="0" rIns="0" bIns="0" rtlCol="0"/>
           <a:lstStyle/>
-          <a:p/>
+          <a:p>
+            <a:endParaRPr/>
+          </a:p>
         </p:txBody>
       </p:sp>
       <p:pic>
         <p:nvPicPr>
-          <p:cNvPr id="114" name="object 114" descr=""/>
+          <p:cNvPr id="114" name="object 114"/>
           <p:cNvPicPr/>
           <p:nvPr/>
         </p:nvPicPr>
         <p:blipFill>
-          <a:blip r:embed="rId55" cstate="print"/>
+          <a:blip r:embed="rId54" cstate="print"/>
           <a:stretch>
             <a:fillRect/>
           </a:stretch>
@@ -16031,7 +16219,7 @@
       </p:pic>
       <p:grpSp>
         <p:nvGrpSpPr>
-          <p:cNvPr id="115" name="object 115" descr=""/>
+          <p:cNvPr id="115" name="object 115"/>
           <p:cNvGrpSpPr/>
           <p:nvPr/>
         </p:nvGrpSpPr>
@@ -16045,7 +16233,7 @@
         </p:grpSpPr>
         <p:sp>
           <p:nvSpPr>
-            <p:cNvPr id="116" name="object 116" descr=""/>
+            <p:cNvPr id="116" name="object 116"/>
             <p:cNvSpPr/>
             <p:nvPr/>
           </p:nvSpPr>
@@ -16240,12 +16428,14 @@
           <p:txBody>
             <a:bodyPr wrap="square" lIns="0" tIns="0" rIns="0" bIns="0" rtlCol="0"/>
             <a:lstStyle/>
-            <a:p/>
+            <a:p>
+              <a:endParaRPr/>
+            </a:p>
           </p:txBody>
         </p:sp>
         <p:sp>
           <p:nvSpPr>
-            <p:cNvPr id="117" name="object 117" descr=""/>
+            <p:cNvPr id="117" name="object 117"/>
             <p:cNvSpPr/>
             <p:nvPr/>
           </p:nvSpPr>
@@ -16305,17 +16495,19 @@
           <p:txBody>
             <a:bodyPr wrap="square" lIns="0" tIns="0" rIns="0" bIns="0" rtlCol="0"/>
             <a:lstStyle/>
-            <a:p/>
+            <a:p>
+              <a:endParaRPr/>
+            </a:p>
           </p:txBody>
         </p:sp>
         <p:pic>
           <p:nvPicPr>
-            <p:cNvPr id="118" name="object 118" descr=""/>
+            <p:cNvPr id="118" name="object 118"/>
             <p:cNvPicPr/>
             <p:nvPr/>
           </p:nvPicPr>
           <p:blipFill>
-            <a:blip r:embed="rId4" cstate="print"/>
+            <a:blip r:embed="rId3" cstate="print"/>
             <a:stretch>
               <a:fillRect/>
             </a:stretch>
@@ -16333,7 +16525,7 @@
       </p:grpSp>
       <p:sp>
         <p:nvSpPr>
-          <p:cNvPr id="119" name="object 119" descr=""/>
+          <p:cNvPr id="119" name="object 119"/>
           <p:cNvSpPr/>
           <p:nvPr/>
         </p:nvSpPr>
@@ -16418,17 +16610,19 @@
         <p:txBody>
           <a:bodyPr wrap="square" lIns="0" tIns="0" rIns="0" bIns="0" rtlCol="0"/>
           <a:lstStyle/>
-          <a:p/>
+          <a:p>
+            <a:endParaRPr/>
+          </a:p>
         </p:txBody>
       </p:sp>
       <p:pic>
         <p:nvPicPr>
-          <p:cNvPr id="120" name="object 120" descr=""/>
+          <p:cNvPr id="120" name="object 120"/>
           <p:cNvPicPr/>
           <p:nvPr/>
         </p:nvPicPr>
         <p:blipFill>
-          <a:blip r:embed="rId56" cstate="print"/>
+          <a:blip r:embed="rId55" cstate="print"/>
           <a:stretch>
             <a:fillRect/>
           </a:stretch>
@@ -16445,7 +16639,7 @@
       </p:pic>
       <p:sp>
         <p:nvSpPr>
-          <p:cNvPr id="121" name="object 121" descr=""/>
+          <p:cNvPr id="121" name="object 121"/>
           <p:cNvSpPr/>
           <p:nvPr/>
         </p:nvSpPr>
@@ -16788,12 +16982,14 @@
         <p:txBody>
           <a:bodyPr wrap="square" lIns="0" tIns="0" rIns="0" bIns="0" rtlCol="0"/>
           <a:lstStyle/>
-          <a:p/>
+          <a:p>
+            <a:endParaRPr/>
+          </a:p>
         </p:txBody>
       </p:sp>
       <p:sp>
         <p:nvSpPr>
-          <p:cNvPr id="122" name="object 122" descr=""/>
+          <p:cNvPr id="122" name="object 122"/>
           <p:cNvSpPr/>
           <p:nvPr/>
         </p:nvSpPr>
@@ -17448,17 +17644,19 @@
         <p:txBody>
           <a:bodyPr wrap="square" lIns="0" tIns="0" rIns="0" bIns="0" rtlCol="0"/>
           <a:lstStyle/>
-          <a:p/>
+          <a:p>
+            <a:endParaRPr/>
+          </a:p>
         </p:txBody>
       </p:sp>
       <p:pic>
         <p:nvPicPr>
-          <p:cNvPr id="123" name="object 123" descr=""/>
+          <p:cNvPr id="123" name="object 123"/>
           <p:cNvPicPr/>
           <p:nvPr/>
         </p:nvPicPr>
         <p:blipFill>
-          <a:blip r:embed="rId57" cstate="print"/>
+          <a:blip r:embed="rId56" cstate="print"/>
           <a:stretch>
             <a:fillRect/>
           </a:stretch>
@@ -17475,12 +17673,12 @@
       </p:pic>
       <p:pic>
         <p:nvPicPr>
-          <p:cNvPr id="124" name="object 124" descr=""/>
+          <p:cNvPr id="124" name="object 124"/>
           <p:cNvPicPr/>
           <p:nvPr/>
         </p:nvPicPr>
         <p:blipFill>
-          <a:blip r:embed="rId58" cstate="print"/>
+          <a:blip r:embed="rId57" cstate="print"/>
           <a:stretch>
             <a:fillRect/>
           </a:stretch>
@@ -17497,7 +17695,7 @@
       </p:pic>
       <p:grpSp>
         <p:nvGrpSpPr>
-          <p:cNvPr id="125" name="object 125" descr=""/>
+          <p:cNvPr id="125" name="object 125"/>
           <p:cNvGrpSpPr/>
           <p:nvPr/>
         </p:nvGrpSpPr>
@@ -17511,7 +17709,7 @@
         </p:grpSpPr>
         <p:sp>
           <p:nvSpPr>
-            <p:cNvPr id="126" name="object 126" descr=""/>
+            <p:cNvPr id="126" name="object 126"/>
             <p:cNvSpPr/>
             <p:nvPr/>
           </p:nvSpPr>
@@ -17604,12 +17802,14 @@
           <p:txBody>
             <a:bodyPr wrap="square" lIns="0" tIns="0" rIns="0" bIns="0" rtlCol="0"/>
             <a:lstStyle/>
-            <a:p/>
+            <a:p>
+              <a:endParaRPr/>
+            </a:p>
           </p:txBody>
         </p:sp>
         <p:sp>
           <p:nvSpPr>
-            <p:cNvPr id="127" name="object 127" descr=""/>
+            <p:cNvPr id="127" name="object 127"/>
             <p:cNvSpPr/>
             <p:nvPr/>
           </p:nvSpPr>
@@ -17702,17 +17902,19 @@
           <p:txBody>
             <a:bodyPr wrap="square" lIns="0" tIns="0" rIns="0" bIns="0" rtlCol="0"/>
             <a:lstStyle/>
-            <a:p/>
+            <a:p>
+              <a:endParaRPr/>
+            </a:p>
           </p:txBody>
         </p:sp>
         <p:pic>
           <p:nvPicPr>
-            <p:cNvPr id="128" name="object 128" descr=""/>
+            <p:cNvPr id="128" name="object 128"/>
             <p:cNvPicPr/>
             <p:nvPr/>
           </p:nvPicPr>
           <p:blipFill>
-            <a:blip r:embed="rId59" cstate="print"/>
+            <a:blip r:embed="rId58" cstate="print"/>
             <a:stretch>
               <a:fillRect/>
             </a:stretch>
@@ -17730,7 +17932,7 @@
       </p:grpSp>
       <p:sp>
         <p:nvSpPr>
-          <p:cNvPr id="129" name="object 129" descr=""/>
+          <p:cNvPr id="129" name="object 129"/>
           <p:cNvSpPr/>
           <p:nvPr/>
         </p:nvSpPr>
@@ -18043,12 +18245,14 @@
         <p:txBody>
           <a:bodyPr wrap="square" lIns="0" tIns="0" rIns="0" bIns="0" rtlCol="0"/>
           <a:lstStyle/>
-          <a:p/>
+          <a:p>
+            <a:endParaRPr/>
+          </a:p>
         </p:txBody>
       </p:sp>
       <p:sp>
         <p:nvSpPr>
-          <p:cNvPr id="130" name="object 130" descr=""/>
+          <p:cNvPr id="130" name="object 130"/>
           <p:cNvSpPr/>
           <p:nvPr/>
         </p:nvSpPr>
@@ -18151,17 +18355,19 @@
         <p:txBody>
           <a:bodyPr wrap="square" lIns="0" tIns="0" rIns="0" bIns="0" rtlCol="0"/>
           <a:lstStyle/>
-          <a:p/>
+          <a:p>
+            <a:endParaRPr/>
+          </a:p>
         </p:txBody>
       </p:sp>
       <p:pic>
         <p:nvPicPr>
-          <p:cNvPr id="131" name="object 131" descr=""/>
+          <p:cNvPr id="131" name="object 131"/>
           <p:cNvPicPr/>
           <p:nvPr/>
         </p:nvPicPr>
         <p:blipFill>
-          <a:blip r:embed="rId60" cstate="print"/>
+          <a:blip r:embed="rId59" cstate="print"/>
           <a:stretch>
             <a:fillRect/>
           </a:stretch>
@@ -18178,12 +18384,12 @@
       </p:pic>
       <p:pic>
         <p:nvPicPr>
-          <p:cNvPr id="132" name="object 132" descr=""/>
+          <p:cNvPr id="132" name="object 132"/>
           <p:cNvPicPr/>
           <p:nvPr/>
         </p:nvPicPr>
         <p:blipFill>
-          <a:blip r:embed="rId61" cstate="print"/>
+          <a:blip r:embed="rId60" cstate="print"/>
           <a:stretch>
             <a:fillRect/>
           </a:stretch>
@@ -18200,12 +18406,12 @@
       </p:pic>
       <p:pic>
         <p:nvPicPr>
-          <p:cNvPr id="133" name="object 133" descr=""/>
+          <p:cNvPr id="133" name="object 133"/>
           <p:cNvPicPr/>
           <p:nvPr/>
         </p:nvPicPr>
         <p:blipFill>
-          <a:blip r:embed="rId62" cstate="print"/>
+          <a:blip r:embed="rId61" cstate="print"/>
           <a:stretch>
             <a:fillRect/>
           </a:stretch>
@@ -18222,7 +18428,7 @@
       </p:pic>
       <p:sp>
         <p:nvSpPr>
-          <p:cNvPr id="134" name="object 134" descr=""/>
+          <p:cNvPr id="134" name="object 134"/>
           <p:cNvSpPr/>
           <p:nvPr/>
         </p:nvSpPr>
@@ -18519,12 +18725,14 @@
         <p:txBody>
           <a:bodyPr wrap="square" lIns="0" tIns="0" rIns="0" bIns="0" rtlCol="0"/>
           <a:lstStyle/>
-          <a:p/>
+          <a:p>
+            <a:endParaRPr/>
+          </a:p>
         </p:txBody>
       </p:sp>
       <p:grpSp>
         <p:nvGrpSpPr>
-          <p:cNvPr id="135" name="object 135" descr=""/>
+          <p:cNvPr id="135" name="object 135"/>
           <p:cNvGrpSpPr/>
           <p:nvPr/>
         </p:nvGrpSpPr>
@@ -18538,7 +18746,7 @@
         </p:grpSpPr>
         <p:sp>
           <p:nvSpPr>
-            <p:cNvPr id="136" name="object 136" descr=""/>
+            <p:cNvPr id="136" name="object 136"/>
             <p:cNvSpPr/>
             <p:nvPr/>
           </p:nvSpPr>
@@ -18623,17 +18831,19 @@
           <p:txBody>
             <a:bodyPr wrap="square" lIns="0" tIns="0" rIns="0" bIns="0" rtlCol="0"/>
             <a:lstStyle/>
-            <a:p/>
+            <a:p>
+              <a:endParaRPr/>
+            </a:p>
           </p:txBody>
         </p:sp>
         <p:pic>
           <p:nvPicPr>
-            <p:cNvPr id="137" name="object 137" descr=""/>
+            <p:cNvPr id="137" name="object 137"/>
             <p:cNvPicPr/>
             <p:nvPr/>
           </p:nvPicPr>
           <p:blipFill>
-            <a:blip r:embed="rId27" cstate="print"/>
+            <a:blip r:embed="rId26" cstate="print"/>
             <a:stretch>
               <a:fillRect/>
             </a:stretch>
@@ -18651,12 +18861,12 @@
       </p:grpSp>
       <p:pic>
         <p:nvPicPr>
-          <p:cNvPr id="138" name="object 138" descr=""/>
+          <p:cNvPr id="138" name="object 138"/>
           <p:cNvPicPr/>
           <p:nvPr/>
         </p:nvPicPr>
         <p:blipFill>
-          <a:blip r:embed="rId63" cstate="print"/>
+          <a:blip r:embed="rId62" cstate="print"/>
           <a:stretch>
             <a:fillRect/>
           </a:stretch>
@@ -18673,12 +18883,12 @@
       </p:pic>
       <p:pic>
         <p:nvPicPr>
-          <p:cNvPr id="139" name="object 139" descr=""/>
+          <p:cNvPr id="139" name="object 139"/>
           <p:cNvPicPr/>
           <p:nvPr/>
         </p:nvPicPr>
         <p:blipFill>
-          <a:blip r:embed="rId64" cstate="print"/>
+          <a:blip r:embed="rId63" cstate="print"/>
           <a:stretch>
             <a:fillRect/>
           </a:stretch>
@@ -18695,12 +18905,12 @@
       </p:pic>
       <p:pic>
         <p:nvPicPr>
-          <p:cNvPr id="140" name="object 140" descr=""/>
+          <p:cNvPr id="140" name="object 140"/>
           <p:cNvPicPr/>
           <p:nvPr/>
         </p:nvPicPr>
         <p:blipFill>
-          <a:blip r:embed="rId30" cstate="print"/>
+          <a:blip r:embed="rId29" cstate="print"/>
           <a:stretch>
             <a:fillRect/>
           </a:stretch>
@@ -18717,12 +18927,12 @@
       </p:pic>
       <p:pic>
         <p:nvPicPr>
-          <p:cNvPr id="141" name="object 141" descr=""/>
+          <p:cNvPr id="141" name="object 141"/>
           <p:cNvPicPr/>
           <p:nvPr/>
         </p:nvPicPr>
         <p:blipFill>
-          <a:blip r:embed="rId65" cstate="print"/>
+          <a:blip r:embed="rId64" cstate="print"/>
           <a:stretch>
             <a:fillRect/>
           </a:stretch>
@@ -18739,12 +18949,12 @@
       </p:pic>
       <p:pic>
         <p:nvPicPr>
-          <p:cNvPr id="142" name="object 142" descr=""/>
+          <p:cNvPr id="142" name="object 142"/>
           <p:cNvPicPr/>
           <p:nvPr/>
         </p:nvPicPr>
         <p:blipFill>
-          <a:blip r:embed="rId66" cstate="print"/>
+          <a:blip r:embed="rId65" cstate="print"/>
           <a:stretch>
             <a:fillRect/>
           </a:stretch>
@@ -18761,12 +18971,12 @@
       </p:pic>
       <p:pic>
         <p:nvPicPr>
-          <p:cNvPr id="143" name="object 143" descr=""/>
+          <p:cNvPr id="143" name="object 143"/>
           <p:cNvPicPr/>
           <p:nvPr/>
         </p:nvPicPr>
         <p:blipFill>
-          <a:blip r:embed="rId67" cstate="print"/>
+          <a:blip r:embed="rId66" cstate="print"/>
           <a:stretch>
             <a:fillRect/>
           </a:stretch>
@@ -18783,12 +18993,12 @@
       </p:pic>
       <p:pic>
         <p:nvPicPr>
-          <p:cNvPr id="144" name="object 144" descr=""/>
+          <p:cNvPr id="144" name="object 144"/>
           <p:cNvPicPr/>
           <p:nvPr/>
         </p:nvPicPr>
         <p:blipFill>
-          <a:blip r:embed="rId34" cstate="print"/>
+          <a:blip r:embed="rId33" cstate="print"/>
           <a:stretch>
             <a:fillRect/>
           </a:stretch>
@@ -18805,12 +19015,12 @@
       </p:pic>
       <p:pic>
         <p:nvPicPr>
-          <p:cNvPr id="145" name="object 145" descr=""/>
+          <p:cNvPr id="145" name="object 145"/>
           <p:cNvPicPr/>
           <p:nvPr/>
         </p:nvPicPr>
         <p:blipFill>
-          <a:blip r:embed="rId68" cstate="print"/>
+          <a:blip r:embed="rId67" cstate="print"/>
           <a:stretch>
             <a:fillRect/>
           </a:stretch>
@@ -18827,12 +19037,12 @@
       </p:pic>
       <p:pic>
         <p:nvPicPr>
-          <p:cNvPr id="146" name="object 146" descr=""/>
+          <p:cNvPr id="146" name="object 146"/>
           <p:cNvPicPr/>
           <p:nvPr/>
         </p:nvPicPr>
         <p:blipFill>
-          <a:blip r:embed="rId36" cstate="print"/>
+          <a:blip r:embed="rId35" cstate="print"/>
           <a:stretch>
             <a:fillRect/>
           </a:stretch>
@@ -18849,12 +19059,12 @@
       </p:pic>
       <p:pic>
         <p:nvPicPr>
-          <p:cNvPr id="147" name="object 147" descr=""/>
+          <p:cNvPr id="147" name="object 147"/>
           <p:cNvPicPr/>
           <p:nvPr/>
         </p:nvPicPr>
         <p:blipFill>
-          <a:blip r:embed="rId69" cstate="print"/>
+          <a:blip r:embed="rId68" cstate="print"/>
           <a:stretch>
             <a:fillRect/>
           </a:stretch>
@@ -18871,12 +19081,12 @@
       </p:pic>
       <p:pic>
         <p:nvPicPr>
-          <p:cNvPr id="148" name="object 148" descr=""/>
+          <p:cNvPr id="148" name="object 148"/>
           <p:cNvPicPr/>
           <p:nvPr/>
         </p:nvPicPr>
         <p:blipFill>
-          <a:blip r:embed="rId38" cstate="print"/>
+          <a:blip r:embed="rId37" cstate="print"/>
           <a:stretch>
             <a:fillRect/>
           </a:stretch>
@@ -18893,12 +19103,12 @@
       </p:pic>
       <p:pic>
         <p:nvPicPr>
-          <p:cNvPr id="149" name="object 149" descr=""/>
+          <p:cNvPr id="149" name="object 149"/>
           <p:cNvPicPr/>
           <p:nvPr/>
         </p:nvPicPr>
         <p:blipFill>
-          <a:blip r:embed="rId70" cstate="print"/>
+          <a:blip r:embed="rId69" cstate="print"/>
           <a:stretch>
             <a:fillRect/>
           </a:stretch>
@@ -18915,12 +19125,12 @@
       </p:pic>
       <p:pic>
         <p:nvPicPr>
-          <p:cNvPr id="150" name="object 150" descr=""/>
+          <p:cNvPr id="150" name="object 150"/>
           <p:cNvPicPr/>
           <p:nvPr/>
         </p:nvPicPr>
         <p:blipFill>
-          <a:blip r:embed="rId71" cstate="print"/>
+          <a:blip r:embed="rId70" cstate="print"/>
           <a:stretch>
             <a:fillRect/>
           </a:stretch>
@@ -18937,12 +19147,12 @@
       </p:pic>
       <p:pic>
         <p:nvPicPr>
-          <p:cNvPr id="151" name="object 151" descr=""/>
+          <p:cNvPr id="151" name="object 151"/>
           <p:cNvPicPr/>
           <p:nvPr/>
         </p:nvPicPr>
         <p:blipFill>
-          <a:blip r:embed="rId72" cstate="print"/>
+          <a:blip r:embed="rId71" cstate="print"/>
           <a:stretch>
             <a:fillRect/>
           </a:stretch>
@@ -18959,12 +19169,12 @@
       </p:pic>
       <p:pic>
         <p:nvPicPr>
-          <p:cNvPr id="152" name="object 152" descr=""/>
+          <p:cNvPr id="152" name="object 152"/>
           <p:cNvPicPr/>
           <p:nvPr/>
         </p:nvPicPr>
         <p:blipFill>
-          <a:blip r:embed="rId42" cstate="print"/>
+          <a:blip r:embed="rId41" cstate="print"/>
           <a:stretch>
             <a:fillRect/>
           </a:stretch>
@@ -18981,12 +19191,12 @@
       </p:pic>
       <p:pic>
         <p:nvPicPr>
-          <p:cNvPr id="153" name="object 153" descr=""/>
+          <p:cNvPr id="153" name="object 153"/>
           <p:cNvPicPr/>
           <p:nvPr/>
         </p:nvPicPr>
         <p:blipFill>
-          <a:blip r:embed="rId73" cstate="print"/>
+          <a:blip r:embed="rId72" cstate="print"/>
           <a:stretch>
             <a:fillRect/>
           </a:stretch>
@@ -19003,12 +19213,12 @@
       </p:pic>
       <p:pic>
         <p:nvPicPr>
-          <p:cNvPr id="154" name="object 154" descr=""/>
+          <p:cNvPr id="154" name="object 154"/>
           <p:cNvPicPr/>
           <p:nvPr/>
         </p:nvPicPr>
         <p:blipFill>
-          <a:blip r:embed="rId52" cstate="print"/>
+          <a:blip r:embed="rId51" cstate="print"/>
           <a:stretch>
             <a:fillRect/>
           </a:stretch>
@@ -19025,12 +19235,12 @@
       </p:pic>
       <p:pic>
         <p:nvPicPr>
-          <p:cNvPr id="155" name="object 155" descr=""/>
+          <p:cNvPr id="155" name="object 155"/>
           <p:cNvPicPr/>
           <p:nvPr/>
         </p:nvPicPr>
         <p:blipFill>
-          <a:blip r:embed="rId74" cstate="print"/>
+          <a:blip r:embed="rId73" cstate="print"/>
           <a:stretch>
             <a:fillRect/>
           </a:stretch>
@@ -19047,12 +19257,12 @@
       </p:pic>
       <p:pic>
         <p:nvPicPr>
-          <p:cNvPr id="156" name="object 156" descr=""/>
+          <p:cNvPr id="156" name="object 156"/>
           <p:cNvPicPr/>
           <p:nvPr/>
         </p:nvPicPr>
         <p:blipFill>
-          <a:blip r:embed="rId44" cstate="print"/>
+          <a:blip r:embed="rId43" cstate="print"/>
           <a:stretch>
             <a:fillRect/>
           </a:stretch>
@@ -19069,12 +19279,12 @@
       </p:pic>
       <p:pic>
         <p:nvPicPr>
-          <p:cNvPr id="157" name="object 157" descr=""/>
+          <p:cNvPr id="157" name="object 157"/>
           <p:cNvPicPr/>
           <p:nvPr/>
         </p:nvPicPr>
         <p:blipFill>
-          <a:blip r:embed="rId75" cstate="print"/>
+          <a:blip r:embed="rId74" cstate="print"/>
           <a:stretch>
             <a:fillRect/>
           </a:stretch>
@@ -19091,12 +19301,12 @@
       </p:pic>
       <p:pic>
         <p:nvPicPr>
-          <p:cNvPr id="158" name="object 158" descr=""/>
+          <p:cNvPr id="158" name="object 158"/>
           <p:cNvPicPr/>
           <p:nvPr/>
         </p:nvPicPr>
         <p:blipFill>
-          <a:blip r:embed="rId76" cstate="print"/>
+          <a:blip r:embed="rId75" cstate="print"/>
           <a:stretch>
             <a:fillRect/>
           </a:stretch>
@@ -19113,12 +19323,12 @@
       </p:pic>
       <p:pic>
         <p:nvPicPr>
-          <p:cNvPr id="159" name="object 159" descr=""/>
+          <p:cNvPr id="159" name="object 159"/>
           <p:cNvPicPr/>
           <p:nvPr/>
         </p:nvPicPr>
         <p:blipFill>
-          <a:blip r:embed="rId77" cstate="print"/>
+          <a:blip r:embed="rId76" cstate="print"/>
           <a:stretch>
             <a:fillRect/>
           </a:stretch>
@@ -19135,12 +19345,12 @@
       </p:pic>
       <p:pic>
         <p:nvPicPr>
-          <p:cNvPr id="160" name="object 160" descr=""/>
+          <p:cNvPr id="160" name="object 160"/>
           <p:cNvPicPr/>
           <p:nvPr/>
         </p:nvPicPr>
         <p:blipFill>
-          <a:blip r:embed="rId78" cstate="print"/>
+          <a:blip r:embed="rId77" cstate="print"/>
           <a:stretch>
             <a:fillRect/>
           </a:stretch>
@@ -19157,12 +19367,12 @@
       </p:pic>
       <p:pic>
         <p:nvPicPr>
-          <p:cNvPr id="161" name="object 161" descr=""/>
+          <p:cNvPr id="161" name="object 161"/>
           <p:cNvPicPr/>
           <p:nvPr/>
         </p:nvPicPr>
         <p:blipFill>
-          <a:blip r:embed="rId79" cstate="print"/>
+          <a:blip r:embed="rId78" cstate="print"/>
           <a:stretch>
             <a:fillRect/>
           </a:stretch>
@@ -19179,12 +19389,12 @@
       </p:pic>
       <p:pic>
         <p:nvPicPr>
-          <p:cNvPr id="162" name="object 162" descr=""/>
+          <p:cNvPr id="162" name="object 162"/>
           <p:cNvPicPr/>
           <p:nvPr/>
         </p:nvPicPr>
         <p:blipFill>
-          <a:blip r:embed="rId50" cstate="print"/>
+          <a:blip r:embed="rId49" cstate="print"/>
           <a:stretch>
             <a:fillRect/>
           </a:stretch>
@@ -19201,12 +19411,12 @@
       </p:pic>
       <p:pic>
         <p:nvPicPr>
-          <p:cNvPr id="163" name="object 163" descr=""/>
+          <p:cNvPr id="163" name="object 163"/>
           <p:cNvPicPr/>
           <p:nvPr/>
         </p:nvPicPr>
         <p:blipFill>
-          <a:blip r:embed="rId80" cstate="print"/>
+          <a:blip r:embed="rId79" cstate="print"/>
           <a:stretch>
             <a:fillRect/>
           </a:stretch>
@@ -19215,6 +19425,42 @@
           <a:xfrm>
             <a:off x="17335896" y="8767633"/>
             <a:ext cx="217196" cy="222785"/>
+          </a:xfrm>
+          <a:prstGeom prst="rect">
+            <a:avLst/>
+          </a:prstGeom>
+        </p:spPr>
+      </p:pic>
+      <p:pic>
+        <p:nvPicPr>
+          <p:cNvPr id="165" name="Slika 164" descr="Slika, ki vsebuje besede pisava, besedilo, grafika, posnetek zaslona&#10;&#10;Vsebina, ustvarjena z UI, morda ni pravilna.">
+            <a:extLst>
+              <a:ext uri="{FF2B5EF4-FFF2-40B4-BE49-F238E27FC236}">
+                <a16:creationId xmlns:a16="http://schemas.microsoft.com/office/drawing/2014/main" id="{02F722C1-6001-EE07-FFEE-58C7A6258922}"/>
+              </a:ext>
+            </a:extLst>
+          </p:cNvPr>
+          <p:cNvPicPr>
+            <a:picLocks noChangeAspect="1"/>
+          </p:cNvPicPr>
+          <p:nvPr/>
+        </p:nvPicPr>
+        <p:blipFill>
+          <a:blip r:embed="rId80">
+            <a:extLst>
+              <a:ext uri="{28A0092B-C50C-407E-A947-70E740481C1C}">
+                <a14:useLocalDpi xmlns:a14="http://schemas.microsoft.com/office/drawing/2010/main" val="0"/>
+              </a:ext>
+            </a:extLst>
+          </a:blip>
+          <a:stretch>
+            <a:fillRect/>
+          </a:stretch>
+        </p:blipFill>
+        <p:spPr>
+          <a:xfrm>
+            <a:off x="374650" y="-494681"/>
+            <a:ext cx="3805067" cy="2717905"/>
           </a:xfrm>
           <a:prstGeom prst="rect">
             <a:avLst/>
@@ -19248,7 +19494,7 @@
       </p:grpSpPr>
       <p:sp>
         <p:nvSpPr>
-          <p:cNvPr id="2" name="object 2" descr=""/>
+          <p:cNvPr id="2" name="object 2"/>
           <p:cNvSpPr/>
           <p:nvPr/>
         </p:nvSpPr>
@@ -19819,12 +20065,14 @@
         <p:txBody>
           <a:bodyPr wrap="square" lIns="0" tIns="0" rIns="0" bIns="0" rtlCol="0"/>
           <a:lstStyle/>
-          <a:p/>
+          <a:p>
+            <a:endParaRPr/>
+          </a:p>
         </p:txBody>
       </p:sp>
       <p:pic>
         <p:nvPicPr>
-          <p:cNvPr id="3" name="object 3" descr=""/>
+          <p:cNvPr id="3" name="object 3"/>
           <p:cNvPicPr/>
           <p:nvPr/>
         </p:nvPicPr>
@@ -19846,7 +20094,7 @@
       </p:pic>
       <p:sp>
         <p:nvSpPr>
-          <p:cNvPr id="4" name="object 4" descr=""/>
+          <p:cNvPr id="4" name="object 4"/>
           <p:cNvSpPr/>
           <p:nvPr/>
         </p:nvSpPr>
@@ -20669,12 +20917,14 @@
         <p:txBody>
           <a:bodyPr wrap="square" lIns="0" tIns="0" rIns="0" bIns="0" rtlCol="0"/>
           <a:lstStyle/>
-          <a:p/>
+          <a:p>
+            <a:endParaRPr/>
+          </a:p>
         </p:txBody>
       </p:sp>
       <p:pic>
         <p:nvPicPr>
-          <p:cNvPr id="5" name="object 5" descr=""/>
+          <p:cNvPr id="5" name="object 5"/>
           <p:cNvPicPr/>
           <p:nvPr/>
         </p:nvPicPr>
@@ -20696,34 +20946,12 @@
       </p:pic>
       <p:pic>
         <p:nvPicPr>
-          <p:cNvPr id="6" name="object 6" descr=""/>
+          <p:cNvPr id="7" name="object 7"/>
           <p:cNvPicPr/>
           <p:nvPr/>
         </p:nvPicPr>
         <p:blipFill>
           <a:blip r:embed="rId4" cstate="print"/>
-          <a:stretch>
-            <a:fillRect/>
-          </a:stretch>
-        </p:blipFill>
-        <p:spPr>
-          <a:xfrm>
-            <a:off x="874616" y="759258"/>
-            <a:ext cx="3562592" cy="313085"/>
-          </a:xfrm>
-          <a:prstGeom prst="rect">
-            <a:avLst/>
-          </a:prstGeom>
-        </p:spPr>
-      </p:pic>
-      <p:pic>
-        <p:nvPicPr>
-          <p:cNvPr id="7" name="object 7" descr=""/>
-          <p:cNvPicPr/>
-          <p:nvPr/>
-        </p:nvPicPr>
-        <p:blipFill>
-          <a:blip r:embed="rId5" cstate="print"/>
           <a:stretch>
             <a:fillRect/>
           </a:stretch>
@@ -20740,34 +20968,12 @@
       </p:pic>
       <p:pic>
         <p:nvPicPr>
-          <p:cNvPr id="8" name="object 8" descr=""/>
+          <p:cNvPr id="9" name="object 9"/>
           <p:cNvPicPr/>
           <p:nvPr/>
         </p:nvPicPr>
         <p:blipFill>
-          <a:blip r:embed="rId6" cstate="print"/>
-          <a:stretch>
-            <a:fillRect/>
-          </a:stretch>
-        </p:blipFill>
-        <p:spPr>
-          <a:xfrm>
-            <a:off x="6103232" y="4307713"/>
-            <a:ext cx="8127586" cy="366109"/>
-          </a:xfrm>
-          <a:prstGeom prst="rect">
-            <a:avLst/>
-          </a:prstGeom>
-        </p:spPr>
-      </p:pic>
-      <p:pic>
-        <p:nvPicPr>
-          <p:cNvPr id="9" name="object 9" descr=""/>
-          <p:cNvPicPr/>
-          <p:nvPr/>
-        </p:nvPicPr>
-        <p:blipFill>
-          <a:blip r:embed="rId7" cstate="print"/>
+          <a:blip r:embed="rId5" cstate="print"/>
           <a:stretch>
             <a:fillRect/>
           </a:stretch>
@@ -20784,12 +20990,12 @@
       </p:pic>
       <p:pic>
         <p:nvPicPr>
-          <p:cNvPr id="10" name="object 10" descr=""/>
+          <p:cNvPr id="10" name="object 10"/>
           <p:cNvPicPr/>
           <p:nvPr/>
         </p:nvPicPr>
         <p:blipFill>
-          <a:blip r:embed="rId8" cstate="print"/>
+          <a:blip r:embed="rId6" cstate="print"/>
           <a:stretch>
             <a:fillRect/>
           </a:stretch>
@@ -20806,12 +21012,12 @@
       </p:pic>
       <p:pic>
         <p:nvPicPr>
-          <p:cNvPr id="11" name="object 11" descr=""/>
+          <p:cNvPr id="11" name="object 11"/>
           <p:cNvPicPr/>
           <p:nvPr/>
         </p:nvPicPr>
         <p:blipFill>
-          <a:blip r:embed="rId9" cstate="print"/>
+          <a:blip r:embed="rId7" cstate="print"/>
           <a:stretch>
             <a:fillRect/>
           </a:stretch>
@@ -20826,31 +21032,9 @@
           </a:prstGeom>
         </p:spPr>
       </p:pic>
-      <p:pic>
-        <p:nvPicPr>
-          <p:cNvPr id="12" name="object 12" descr=""/>
-          <p:cNvPicPr/>
-          <p:nvPr/>
-        </p:nvPicPr>
-        <p:blipFill>
-          <a:blip r:embed="rId10" cstate="print"/>
-          <a:stretch>
-            <a:fillRect/>
-          </a:stretch>
-        </p:blipFill>
-        <p:spPr>
-          <a:xfrm>
-            <a:off x="6103232" y="8990400"/>
-            <a:ext cx="11144851" cy="389133"/>
-          </a:xfrm>
-          <a:prstGeom prst="rect">
-            <a:avLst/>
-          </a:prstGeom>
-        </p:spPr>
-      </p:pic>
       <p:sp>
         <p:nvSpPr>
-          <p:cNvPr id="13" name="object 13" descr=""/>
+          <p:cNvPr id="13" name="object 13"/>
           <p:cNvSpPr/>
           <p:nvPr/>
         </p:nvSpPr>
@@ -21856,7 +22040,149 @@
         <p:txBody>
           <a:bodyPr wrap="square" lIns="0" tIns="0" rIns="0" bIns="0" rtlCol="0"/>
           <a:lstStyle/>
-          <a:p/>
+          <a:p>
+            <a:endParaRPr/>
+          </a:p>
+        </p:txBody>
+      </p:sp>
+      <p:pic>
+        <p:nvPicPr>
+          <p:cNvPr id="15" name="Slika 14" descr="Slika, ki vsebuje besede pisava, besedilo, grafika, posnetek zaslona&#10;&#10;Vsebina, ustvarjena z UI, morda ni pravilna.">
+            <a:extLst>
+              <a:ext uri="{FF2B5EF4-FFF2-40B4-BE49-F238E27FC236}">
+                <a16:creationId xmlns:a16="http://schemas.microsoft.com/office/drawing/2014/main" id="{530F2545-4E8D-7E37-C93A-56E6E3EA906D}"/>
+              </a:ext>
+            </a:extLst>
+          </p:cNvPr>
+          <p:cNvPicPr>
+            <a:picLocks noChangeAspect="1"/>
+          </p:cNvPicPr>
+          <p:nvPr/>
+        </p:nvPicPr>
+        <p:blipFill>
+          <a:blip r:embed="rId8">
+            <a:extLst>
+              <a:ext uri="{28A0092B-C50C-407E-A947-70E740481C1C}">
+                <a14:useLocalDpi xmlns:a14="http://schemas.microsoft.com/office/drawing/2010/main" val="0"/>
+              </a:ext>
+            </a:extLst>
+          </a:blip>
+          <a:stretch>
+            <a:fillRect/>
+          </a:stretch>
+        </p:blipFill>
+        <p:spPr>
+          <a:xfrm>
+            <a:off x="374650" y="-391868"/>
+            <a:ext cx="3744570" cy="2674693"/>
+          </a:xfrm>
+          <a:prstGeom prst="rect">
+            <a:avLst/>
+          </a:prstGeom>
+        </p:spPr>
+      </p:pic>
+      <p:sp>
+        <p:nvSpPr>
+          <p:cNvPr id="16" name="PoljeZBesedilom 15">
+            <a:extLst>
+              <a:ext uri="{FF2B5EF4-FFF2-40B4-BE49-F238E27FC236}">
+                <a16:creationId xmlns:a16="http://schemas.microsoft.com/office/drawing/2014/main" id="{304B1EDB-AA4E-8B89-50F3-87A1000929BC}"/>
+              </a:ext>
+            </a:extLst>
+          </p:cNvPr>
+          <p:cNvSpPr txBox="1"/>
+          <p:nvPr/>
+        </p:nvSpPr>
+        <p:spPr>
+          <a:xfrm>
+            <a:off x="6089650" y="9064936"/>
+            <a:ext cx="7029365" cy="369332"/>
+          </a:xfrm>
+          <a:prstGeom prst="rect">
+            <a:avLst/>
+          </a:prstGeom>
+          <a:noFill/>
+        </p:spPr>
+        <p:txBody>
+          <a:bodyPr wrap="square" rtlCol="0">
+            <a:spAutoFit/>
+          </a:bodyPr>
+          <a:lstStyle/>
+          <a:p>
+            <a:r>
+              <a:rPr lang="sl-SI" dirty="0" err="1">
+                <a:latin typeface="Arial" panose="020B0604020202020204" pitchFamily="34" charset="0"/>
+                <a:cs typeface="Arial" panose="020B0604020202020204" pitchFamily="34" charset="0"/>
+              </a:rPr>
+              <a:t>React</a:t>
+            </a:r>
+            <a:r>
+              <a:rPr lang="sl-SI" dirty="0">
+                <a:latin typeface="Arial" panose="020B0604020202020204" pitchFamily="34" charset="0"/>
+                <a:cs typeface="Arial" panose="020B0604020202020204" pitchFamily="34" charset="0"/>
+              </a:rPr>
+              <a:t>, </a:t>
+            </a:r>
+            <a:r>
+              <a:rPr lang="sl-SI" dirty="0" err="1">
+                <a:latin typeface="Arial" panose="020B0604020202020204" pitchFamily="34" charset="0"/>
+                <a:cs typeface="Arial" panose="020B0604020202020204" pitchFamily="34" charset="0"/>
+              </a:rPr>
+              <a:t>Next</a:t>
+            </a:r>
+            <a:r>
+              <a:rPr lang="sl-SI" dirty="0">
+                <a:latin typeface="Arial" panose="020B0604020202020204" pitchFamily="34" charset="0"/>
+                <a:cs typeface="Arial" panose="020B0604020202020204" pitchFamily="34" charset="0"/>
+              </a:rPr>
+              <a:t> JS, </a:t>
+            </a:r>
+            <a:r>
+              <a:rPr lang="sl-SI" dirty="0" err="1">
+                <a:latin typeface="Arial" panose="020B0604020202020204" pitchFamily="34" charset="0"/>
+                <a:cs typeface="Arial" panose="020B0604020202020204" pitchFamily="34" charset="0"/>
+              </a:rPr>
+              <a:t>Typescript</a:t>
+            </a:r>
+            <a:r>
+              <a:rPr lang="sl-SI" dirty="0">
+                <a:latin typeface="Arial" panose="020B0604020202020204" pitchFamily="34" charset="0"/>
+                <a:cs typeface="Arial" panose="020B0604020202020204" pitchFamily="34" charset="0"/>
+              </a:rPr>
+              <a:t>, </a:t>
+            </a:r>
+            <a:r>
+              <a:rPr lang="sl-SI" sz="1800" dirty="0" err="1"/>
+              <a:t>Tailwind</a:t>
+            </a:r>
+            <a:r>
+              <a:rPr lang="sl-SI" sz="1800" dirty="0"/>
+              <a:t> CSS, </a:t>
+            </a:r>
+            <a:r>
+              <a:rPr lang="sl-SI" sz="1800" dirty="0" err="1"/>
+              <a:t>Firebase</a:t>
+            </a:r>
+            <a:r>
+              <a:rPr lang="sl-SI" sz="1800" dirty="0"/>
+              <a:t>, </a:t>
+            </a:r>
+            <a:r>
+              <a:rPr lang="sl-SI" sz="1800"/>
+              <a:t>LocalStorage</a:t>
+            </a:r>
+            <a:r>
+              <a:rPr lang="sl-SI">
+                <a:latin typeface="Arial" panose="020B0604020202020204" pitchFamily="34" charset="0"/>
+                <a:cs typeface="Arial" panose="020B0604020202020204" pitchFamily="34" charset="0"/>
+              </a:rPr>
+              <a:t> </a:t>
+            </a:r>
+            <a:endParaRPr lang="sl-SI" dirty="0">
+              <a:latin typeface="Arial" panose="020B0604020202020204" pitchFamily="34" charset="0"/>
+              <a:cs typeface="Arial" panose="020B0604020202020204" pitchFamily="34" charset="0"/>
+            </a:endParaRPr>
+          </a:p>
         </p:txBody>
       </p:sp>
     </p:spTree>

--- a/_PROMOCIJA/Predstavitev/Predstavitev.pptx
+++ b/_PROMOCIJA/Predstavitev/Predstavitev.pptx
@@ -19467,6 +19467,78 @@
           </a:prstGeom>
         </p:spPr>
       </p:pic>
+      <p:sp>
+        <p:nvSpPr>
+          <p:cNvPr id="166" name="PoljeZBesedilom 165">
+            <a:extLst>
+              <a:ext uri="{FF2B5EF4-FFF2-40B4-BE49-F238E27FC236}">
+                <a16:creationId xmlns:a16="http://schemas.microsoft.com/office/drawing/2014/main" id="{22EF1DA3-3B34-FAE1-CA58-5D75239D211F}"/>
+              </a:ext>
+            </a:extLst>
+          </p:cNvPr>
+          <p:cNvSpPr txBox="1"/>
+          <p:nvPr/>
+        </p:nvSpPr>
+        <p:spPr>
+          <a:xfrm>
+            <a:off x="865989" y="6763566"/>
+            <a:ext cx="3805067" cy="1200329"/>
+          </a:xfrm>
+          <a:prstGeom prst="rect">
+            <a:avLst/>
+          </a:prstGeom>
+          <a:noFill/>
+        </p:spPr>
+        <p:txBody>
+          <a:bodyPr wrap="square" rtlCol="0">
+            <a:spAutoFit/>
+          </a:bodyPr>
+          <a:lstStyle/>
+          <a:p>
+            <a:r>
+              <a:rPr lang="sl-SI" sz="2400" dirty="0">
+                <a:solidFill>
+                  <a:schemeClr val="bg1"/>
+                </a:solidFill>
+              </a:rPr>
+              <a:t>Matija Čoh, </a:t>
+            </a:r>
+          </a:p>
+          <a:p>
+            <a:r>
+              <a:rPr lang="sl-SI" sz="2400" dirty="0">
+                <a:solidFill>
+                  <a:schemeClr val="bg1"/>
+                </a:solidFill>
+              </a:rPr>
+              <a:t>Aleš Fon Cafnik, </a:t>
+            </a:r>
+          </a:p>
+          <a:p>
+            <a:r>
+              <a:rPr lang="sl-SI" sz="2400" dirty="0">
+                <a:solidFill>
+                  <a:schemeClr val="bg1"/>
+                </a:solidFill>
+              </a:rPr>
+              <a:t>Miha </a:t>
+            </a:r>
+            <a:r>
+              <a:rPr lang="sl-SI" sz="2400" dirty="0" err="1">
+                <a:solidFill>
+                  <a:schemeClr val="bg1"/>
+                </a:solidFill>
+              </a:rPr>
+              <a:t>Govedič</a:t>
+            </a:r>
+            <a:endParaRPr lang="sl-SI" sz="2400" dirty="0">
+              <a:solidFill>
+                <a:schemeClr val="bg1"/>
+              </a:solidFill>
+            </a:endParaRPr>
+          </a:p>
+        </p:txBody>
+      </p:sp>
     </p:spTree>
   </p:cSld>
   <p:clrMapOvr>
@@ -20980,30 +21052,8 @@
         </p:blipFill>
         <p:spPr>
           <a:xfrm>
-            <a:off x="6089712" y="4831257"/>
+            <a:off x="6081368" y="4196579"/>
             <a:ext cx="3524486" cy="366109"/>
-          </a:xfrm>
-          <a:prstGeom prst="rect">
-            <a:avLst/>
-          </a:prstGeom>
-        </p:spPr>
-      </p:pic>
-      <p:pic>
-        <p:nvPicPr>
-          <p:cNvPr id="10" name="object 10"/>
-          <p:cNvPicPr/>
-          <p:nvPr/>
-        </p:nvPicPr>
-        <p:blipFill>
-          <a:blip r:embed="rId6" cstate="print"/>
-          <a:stretch>
-            <a:fillRect/>
-          </a:stretch>
-        </p:blipFill>
-        <p:spPr>
-          <a:xfrm>
-            <a:off x="6089712" y="5354801"/>
-            <a:ext cx="1912501" cy="366109"/>
           </a:xfrm>
           <a:prstGeom prst="rect">
             <a:avLst/>
@@ -21017,7 +21067,7 @@
           <p:nvPr/>
         </p:nvPicPr>
         <p:blipFill>
-          <a:blip r:embed="rId7" cstate="print"/>
+          <a:blip r:embed="rId6" cstate="print"/>
           <a:stretch>
             <a:fillRect/>
           </a:stretch>
@@ -21040,7 +21090,7 @@
         </p:nvSpPr>
         <p:spPr>
           <a:xfrm>
-            <a:off x="865989" y="9053508"/>
+            <a:off x="908050" y="9087980"/>
             <a:ext cx="1635125" cy="292100"/>
           </a:xfrm>
           <a:custGeom>
@@ -22060,7 +22110,7 @@
           <p:nvPr/>
         </p:nvPicPr>
         <p:blipFill>
-          <a:blip r:embed="rId8">
+          <a:blip r:embed="rId7">
             <a:extLst>
               <a:ext uri="{28A0092B-C50C-407E-A947-70E740481C1C}">
                 <a14:useLocalDpi xmlns:a14="http://schemas.microsoft.com/office/drawing/2010/main" val="0"/>
@@ -22073,7 +22123,7 @@
         </p:blipFill>
         <p:spPr>
           <a:xfrm>
-            <a:off x="374650" y="-391868"/>
+            <a:off x="374650" y="-490770"/>
             <a:ext cx="3744570" cy="2674693"/>
           </a:xfrm>
           <a:prstGeom prst="rect">
@@ -22095,8 +22145,8 @@
         </p:nvSpPr>
         <p:spPr>
           <a:xfrm>
-            <a:off x="6089650" y="9064936"/>
-            <a:ext cx="7029365" cy="369332"/>
+            <a:off x="6024292" y="8903027"/>
+            <a:ext cx="7241809" cy="954107"/>
           </a:xfrm>
           <a:prstGeom prst="rect">
             <a:avLst/>
@@ -22110,77 +22160,197 @@
           <a:lstStyle/>
           <a:p>
             <a:r>
-              <a:rPr lang="sl-SI" dirty="0" err="1">
+              <a:rPr lang="sl-SI" sz="2800" dirty="0" err="1">
+                <a:solidFill>
+                  <a:schemeClr val="bg1"/>
+                </a:solidFill>
                 <a:latin typeface="Arial" panose="020B0604020202020204" pitchFamily="34" charset="0"/>
                 <a:cs typeface="Arial" panose="020B0604020202020204" pitchFamily="34" charset="0"/>
               </a:rPr>
               <a:t>React</a:t>
             </a:r>
             <a:r>
-              <a:rPr lang="sl-SI" dirty="0">
+              <a:rPr lang="sl-SI" sz="2800" dirty="0">
+                <a:solidFill>
+                  <a:schemeClr val="bg1"/>
+                </a:solidFill>
                 <a:latin typeface="Arial" panose="020B0604020202020204" pitchFamily="34" charset="0"/>
                 <a:cs typeface="Arial" panose="020B0604020202020204" pitchFamily="34" charset="0"/>
               </a:rPr>
               <a:t>, </a:t>
             </a:r>
             <a:r>
-              <a:rPr lang="sl-SI" dirty="0" err="1">
+              <a:rPr lang="sl-SI" sz="2800" dirty="0" err="1">
+                <a:solidFill>
+                  <a:schemeClr val="bg1"/>
+                </a:solidFill>
                 <a:latin typeface="Arial" panose="020B0604020202020204" pitchFamily="34" charset="0"/>
                 <a:cs typeface="Arial" panose="020B0604020202020204" pitchFamily="34" charset="0"/>
               </a:rPr>
               <a:t>Next</a:t>
             </a:r>
             <a:r>
-              <a:rPr lang="sl-SI" dirty="0">
+              <a:rPr lang="sl-SI" sz="2800" dirty="0">
+                <a:solidFill>
+                  <a:schemeClr val="bg1"/>
+                </a:solidFill>
                 <a:latin typeface="Arial" panose="020B0604020202020204" pitchFamily="34" charset="0"/>
                 <a:cs typeface="Arial" panose="020B0604020202020204" pitchFamily="34" charset="0"/>
               </a:rPr>
               <a:t> JS, </a:t>
             </a:r>
             <a:r>
-              <a:rPr lang="sl-SI" dirty="0" err="1">
+              <a:rPr lang="sl-SI" sz="2800" dirty="0" err="1">
+                <a:solidFill>
+                  <a:schemeClr val="bg1"/>
+                </a:solidFill>
                 <a:latin typeface="Arial" panose="020B0604020202020204" pitchFamily="34" charset="0"/>
                 <a:cs typeface="Arial" panose="020B0604020202020204" pitchFamily="34" charset="0"/>
               </a:rPr>
               <a:t>Typescript</a:t>
             </a:r>
             <a:r>
-              <a:rPr lang="sl-SI" dirty="0">
+              <a:rPr lang="sl-SI" sz="2800" dirty="0">
+                <a:solidFill>
+                  <a:schemeClr val="bg1"/>
+                </a:solidFill>
                 <a:latin typeface="Arial" panose="020B0604020202020204" pitchFamily="34" charset="0"/>
                 <a:cs typeface="Arial" panose="020B0604020202020204" pitchFamily="34" charset="0"/>
               </a:rPr>
               <a:t>, </a:t>
             </a:r>
             <a:r>
-              <a:rPr lang="sl-SI" sz="1800" dirty="0" err="1"/>
+              <a:rPr lang="sl-SI" sz="2800" dirty="0" err="1">
+                <a:solidFill>
+                  <a:schemeClr val="bg1"/>
+                </a:solidFill>
+              </a:rPr>
               <a:t>Tailwind</a:t>
             </a:r>
             <a:r>
-              <a:rPr lang="sl-SI" sz="1800" dirty="0"/>
+              <a:rPr lang="sl-SI" sz="2800" dirty="0">
+                <a:solidFill>
+                  <a:schemeClr val="bg1"/>
+                </a:solidFill>
+              </a:rPr>
               <a:t> CSS, </a:t>
             </a:r>
             <a:r>
-              <a:rPr lang="sl-SI" sz="1800" dirty="0" err="1"/>
+              <a:rPr lang="sl-SI" sz="2800" dirty="0" err="1">
+                <a:solidFill>
+                  <a:schemeClr val="bg1"/>
+                </a:solidFill>
+              </a:rPr>
               <a:t>Firebase</a:t>
             </a:r>
             <a:r>
-              <a:rPr lang="sl-SI" sz="1800" dirty="0"/>
+              <a:rPr lang="sl-SI" sz="2800" dirty="0">
+                <a:solidFill>
+                  <a:schemeClr val="bg1"/>
+                </a:solidFill>
+              </a:rPr>
               <a:t>, </a:t>
             </a:r>
             <a:r>
-              <a:rPr lang="sl-SI" sz="1800"/>
+              <a:rPr lang="sl-SI" sz="2800" dirty="0" err="1">
+                <a:solidFill>
+                  <a:schemeClr val="bg1"/>
+                </a:solidFill>
+              </a:rPr>
               <a:t>LocalStorage</a:t>
             </a:r>
             <a:r>
-              <a:rPr lang="sl-SI">
+              <a:rPr lang="sl-SI" sz="2800" dirty="0">
+                <a:solidFill>
+                  <a:schemeClr val="bg1"/>
+                </a:solidFill>
                 <a:latin typeface="Arial" panose="020B0604020202020204" pitchFamily="34" charset="0"/>
                 <a:cs typeface="Arial" panose="020B0604020202020204" pitchFamily="34" charset="0"/>
               </a:rPr>
               <a:t> </a:t>
             </a:r>
-            <a:endParaRPr lang="sl-SI" dirty="0">
-              <a:latin typeface="Arial" panose="020B0604020202020204" pitchFamily="34" charset="0"/>
-              <a:cs typeface="Arial" panose="020B0604020202020204" pitchFamily="34" charset="0"/>
+          </a:p>
+        </p:txBody>
+      </p:sp>
+      <p:sp>
+        <p:nvSpPr>
+          <p:cNvPr id="17" name="PoljeZBesedilom 16">
+            <a:extLst>
+              <a:ext uri="{FF2B5EF4-FFF2-40B4-BE49-F238E27FC236}">
+                <a16:creationId xmlns:a16="http://schemas.microsoft.com/office/drawing/2014/main" id="{839311CD-FC14-CA19-B667-33DE8399D6C0}"/>
+              </a:ext>
+            </a:extLst>
+          </p:cNvPr>
+          <p:cNvSpPr txBox="1"/>
+          <p:nvPr/>
+        </p:nvSpPr>
+        <p:spPr>
+          <a:xfrm>
+            <a:off x="6024292" y="5112994"/>
+            <a:ext cx="4256358" cy="523220"/>
+          </a:xfrm>
+          <a:prstGeom prst="rect">
+            <a:avLst/>
+          </a:prstGeom>
+          <a:noFill/>
+        </p:spPr>
+        <p:txBody>
+          <a:bodyPr wrap="square" rtlCol="0">
+            <a:spAutoFit/>
+          </a:bodyPr>
+          <a:lstStyle/>
+          <a:p>
+            <a:r>
+              <a:rPr lang="sl-SI" sz="2800" dirty="0">
+                <a:solidFill>
+                  <a:schemeClr val="bg1"/>
+                </a:solidFill>
+              </a:rPr>
+              <a:t>Statistika - točkovanje</a:t>
+            </a:r>
+          </a:p>
+        </p:txBody>
+      </p:sp>
+      <p:sp>
+        <p:nvSpPr>
+          <p:cNvPr id="18" name="PoljeZBesedilom 17">
+            <a:extLst>
+              <a:ext uri="{FF2B5EF4-FFF2-40B4-BE49-F238E27FC236}">
+                <a16:creationId xmlns:a16="http://schemas.microsoft.com/office/drawing/2014/main" id="{3CDC0C3F-DCE5-D4CC-A0A4-DFE8B7365C81}"/>
+              </a:ext>
+            </a:extLst>
+          </p:cNvPr>
+          <p:cNvSpPr txBox="1"/>
+          <p:nvPr/>
+        </p:nvSpPr>
+        <p:spPr>
+          <a:xfrm>
+            <a:off x="5991162" y="4631642"/>
+            <a:ext cx="3948818" cy="523220"/>
+          </a:xfrm>
+          <a:prstGeom prst="rect">
+            <a:avLst/>
+          </a:prstGeom>
+          <a:noFill/>
+        </p:spPr>
+        <p:txBody>
+          <a:bodyPr wrap="square" rtlCol="0">
+            <a:spAutoFit/>
+          </a:bodyPr>
+          <a:lstStyle/>
+          <a:p>
+            <a:r>
+              <a:rPr lang="sl-SI" sz="2800" dirty="0" err="1">
+                <a:solidFill>
+                  <a:schemeClr val="bg1"/>
+                </a:solidFill>
+              </a:rPr>
+              <a:t>Timer</a:t>
+            </a:r>
+            <a:endParaRPr lang="sl-SI" sz="2800" dirty="0">
+              <a:solidFill>
+                <a:schemeClr val="bg1"/>
+              </a:solidFill>
             </a:endParaRPr>
           </a:p>
         </p:txBody>
